--- a/Topic_C/Exam_Practice/TC-L11_Speaking_Workshop_Integrated_Communication_Workshop.pptx
+++ b/Topic_C/Exam_Practice/TC-L11_Speaking_Workshop_Integrated_Communication_Workshop.pptx
@@ -615,7 +615,11 @@
           <a:lstStyle/>
           <a:p>
             <a:r>
-              <a:rPr lang="en-US" dirty="0"/>
+              <a:rPr lang="ar-SA" dirty="0">
+                <a:latin typeface="Amiri" pitchFamily="2" charset="-78"/>
+                <a:ea typeface="Amiri" pitchFamily="2" charset="-78"/>
+                <a:cs typeface="Amiri" pitchFamily="2" charset="-78"/>
+              </a:rPr>
               <a:t>ROLE PLAY C (Develop) — a pen-friend video call.
 SET-UP IN THE BREAKOUT ROOM: A = examiner (reads the left column ONLY — the questions, in order), B = candidate (sees the task column; Core may use the help column), C = observer (ticks the feedback checklist). 1 minute preparation, about 3 minutes speaking, 1 minute feedback, then rotate.
 Task ! is the unexpected question: in the exam the candidate has not seen it — the examiner should read it without warning.
@@ -707,7 +711,11 @@
           <a:lstStyle/>
           <a:p>
             <a:r>
-              <a:rPr lang="en-US" dirty="0"/>
+              <a:rPr lang="ar-SA" dirty="0">
+                <a:latin typeface="Amiri" pitchFamily="2" charset="-78"/>
+                <a:ea typeface="Amiri" pitchFamily="2" charset="-78"/>
+                <a:cs typeface="Amiri" pitchFamily="2" charset="-78"/>
+              </a:rPr>
               <a:t>ROLE PLAY D (Stretch) — a youth council interview.
 SET-UP IN THE BREAKOUT ROOM: A = examiner (reads the left column ONLY — the questions, in order), B = candidate (sees the task column; Core may use the help column), C = observer (ticks the feedback checklist). 1 minute preparation, about 3 minutes speaking, 1 minute feedback, then rotate.
 Task ! is the unexpected question: in the exam the candidate has not seen it — the examiner should read it without warning.
@@ -1243,7 +1251,11 @@
           <a:lstStyle/>
           <a:p>
             <a:r>
-              <a:rPr lang="en-US" dirty="0"/>
+              <a:rPr lang="ar-SA" dirty="0">
+                <a:latin typeface="Amiri" pitchFamily="2" charset="-78"/>
+                <a:ea typeface="Amiri" pitchFamily="2" charset="-78"/>
+                <a:cs typeface="Amiri" pitchFamily="2" charset="-78"/>
+              </a:rPr>
               <a:t>TOPIC CONVERSATION — Core. Examiner asks the questions in order and may add “لِمَاذَا؟ / هَلْ يُمْكِنُ أَنْ تَشْرَحَ أَكْثَرَ؟” to push for more. Candidate aims for one full sentence per question.
 </a:t>
             </a:r>
@@ -1332,7 +1344,11 @@
           <a:lstStyle/>
           <a:p>
             <a:r>
-              <a:rPr lang="en-US" dirty="0"/>
+              <a:rPr lang="ar-SA" dirty="0">
+                <a:latin typeface="Amiri" pitchFamily="2" charset="-78"/>
+                <a:ea typeface="Amiri" pitchFamily="2" charset="-78"/>
+                <a:cs typeface="Amiri" pitchFamily="2" charset="-78"/>
+              </a:rPr>
               <a:t>TOPIC CONVERSATION — Develop. Examiner asks the questions in order and may add “لِمَاذَا؟ / هَلْ يُمْكِنُ أَنْ تَشْرَحَ أَكْثَرَ؟” to push for more. Candidate aims for two or three sentences, with linkers and two time frames.
 </a:t>
             </a:r>
@@ -1421,7 +1437,11 @@
           <a:lstStyle/>
           <a:p>
             <a:r>
-              <a:rPr lang="en-US" dirty="0"/>
+              <a:rPr lang="ar-SA" dirty="0">
+                <a:latin typeface="Amiri" pitchFamily="2" charset="-78"/>
+                <a:ea typeface="Amiri" pitchFamily="2" charset="-78"/>
+                <a:cs typeface="Amiri" pitchFamily="2" charset="-78"/>
+              </a:rPr>
               <a:t>TOPIC CONVERSATION — Stretch. Examiner asks the questions in order and may add “لِمَاذَا؟ / هَلْ يُمْكِنُ أَنْ تَشْرَحَ أَكْثَرَ؟” to push for more. Candidate aims for a developed answer: opinion, balance, concession and a conditional.
 </a:t>
             </a:r>
@@ -1510,7 +1530,11 @@
           <a:lstStyle/>
           <a:p>
             <a:r>
-              <a:rPr lang="en-US" dirty="0"/>
+              <a:rPr lang="ar-SA" dirty="0">
+                <a:latin typeface="Amiri" pitchFamily="2" charset="-78"/>
+                <a:ea typeface="Amiri" pitchFamily="2" charset="-78"/>
+                <a:cs typeface="Amiri" pitchFamily="2" charset="-78"/>
+              </a:rPr>
               <a:t>WELCOME (1 min) — while students join.
 • Greet each student by name as they arrive: السَّلَامُ عَلَيْكُمْ. Take the register (Pastoral Tracker: attendance 0/1).
 • 2-MINUTE CHECK-IN (SEND training): a private chat to any student who seemed unsettled last lesson — “Are you okay today? 👍 / 👎”.
@@ -2224,7 +2248,11 @@
           <a:lstStyle/>
           <a:p>
             <a:r>
-              <a:rPr lang="en-US" dirty="0"/>
+              <a:rPr lang="ar-SA" dirty="0">
+                <a:latin typeface="Amiri" pitchFamily="2" charset="-78"/>
+                <a:ea typeface="Amiri" pitchFamily="2" charset="-78"/>
+                <a:cs typeface="Amiri" pitchFamily="2" charset="-78"/>
+              </a:rPr>
               <a:t>TEACH (3 min). Role play = precise and complete; conversation = develop. Choral repetition of the repair phrases. To a girl: تُعِيدِي.</a:t>
             </a:r>
             <a:endParaRPr lang="en-US" dirty="0"/>
@@ -2312,7 +2340,11 @@
           <a:lstStyle/>
           <a:p>
             <a:r>
-              <a:rPr lang="en-US" dirty="0"/>
+              <a:rPr lang="ar-SA" dirty="0">
+                <a:latin typeface="Amiri" pitchFamily="2" charset="-78"/>
+                <a:ea typeface="Amiri" pitchFamily="2" charset="-78"/>
+                <a:cs typeface="Amiri" pitchFamily="2" charset="-78"/>
+              </a:rPr>
               <a:t>LANGUAGE BANK (2 min) — linkers turn a list into an answer: أَوَّلًا … ثُمَّ … بِالإِضَافَةِ إِلَى ذٰلِكَ … مَعَ ذٰلِكَ … لِذٰلِكَ. Target: three different linkers in every developed answer.</a:t>
             </a:r>
             <a:endParaRPr lang="en-US" dirty="0"/>
@@ -2576,7 +2608,11 @@
           <a:lstStyle/>
           <a:p>
             <a:r>
-              <a:rPr lang="en-US" dirty="0"/>
+              <a:rPr lang="ar-SA" dirty="0">
+                <a:latin typeface="Amiri" pitchFamily="2" charset="-78"/>
+                <a:ea typeface="Amiri" pitchFamily="2" charset="-78"/>
+                <a:cs typeface="Amiri" pitchFamily="2" charset="-78"/>
+              </a:rPr>
               <a:t>ROLE PLAY A (Core) — a hostel reception.
 SET-UP IN THE BREAKOUT ROOM: A = examiner (reads the left column ONLY — the questions, in order), B = candidate (sees the task column; Core may use the help column), C = observer (ticks the feedback checklist). 1 minute preparation, about 3 minutes speaking, 1 minute feedback, then rotate.
 Task ! is the unexpected question: in the exam the candidate has not seen it — the examiner should read it without warning.
@@ -3156,6 +3192,7 @@
                   <a:srgbClr val="D4AF37"/>
                 </a:solidFill>
                 <a:latin typeface="Amiri" pitchFamily="2" charset="-78"/>
+                <a:ea typeface="Amiri" pitchFamily="2" charset="-78"/>
                 <a:cs typeface="Amiri" pitchFamily="2" charset="-78"/>
               </a:rPr>
               <a:t>م</a:t>
@@ -3362,6 +3399,7 @@
                   <a:srgbClr val="D4AF37"/>
                 </a:solidFill>
                 <a:latin typeface="Amiri" pitchFamily="2" charset="-78"/>
+                <a:ea typeface="Amiri" pitchFamily="2" charset="-78"/>
                 <a:cs typeface="Amiri" pitchFamily="2" charset="-78"/>
               </a:rPr>
               <a:t>وَرْشَةُ التَّحَدُّثِ — وَرْشَةُ التَّوَاصُلِ المُتَكَامِلِ</a:t>
@@ -3413,6 +3451,7 @@
                   <a:srgbClr val="C6D2E6"/>
                 </a:solidFill>
                 <a:latin typeface="Amiri" pitchFamily="2" charset="-78"/>
+                <a:ea typeface="Amiri" pitchFamily="2" charset="-78"/>
                 <a:cs typeface="Amiri" pitchFamily="2" charset="-78"/>
               </a:rPr>
               <a:t>أَوَّلًا</a:t>
@@ -3439,6 +3478,7 @@
                   <a:srgbClr val="C6D2E6"/>
                 </a:solidFill>
                 <a:latin typeface="Amiri" pitchFamily="2" charset="-78"/>
+                <a:ea typeface="Amiri" pitchFamily="2" charset="-78"/>
                 <a:cs typeface="Amiri" pitchFamily="2" charset="-78"/>
               </a:rPr>
               <a:t>بِالإِضَافَةِ إِلَى ذٰلِكَ</a:t>
@@ -3465,6 +3505,7 @@
                   <a:srgbClr val="C6D2E6"/>
                 </a:solidFill>
                 <a:latin typeface="Amiri" pitchFamily="2" charset="-78"/>
+                <a:ea typeface="Amiri" pitchFamily="2" charset="-78"/>
                 <a:cs typeface="Amiri" pitchFamily="2" charset="-78"/>
               </a:rPr>
               <a:t>مَعَ ذٰلِكَ</a:t>
@@ -3491,6 +3532,7 @@
                   <a:srgbClr val="C6D2E6"/>
                 </a:solidFill>
                 <a:latin typeface="Amiri" pitchFamily="2" charset="-78"/>
+                <a:ea typeface="Amiri" pitchFamily="2" charset="-78"/>
                 <a:cs typeface="Amiri" pitchFamily="2" charset="-78"/>
               </a:rPr>
               <a:t>لِذٰلِكَ</a:t>
@@ -3923,6 +3965,7 @@
                   <a:srgbClr val="D4AF37"/>
                 </a:solidFill>
                 <a:latin typeface="Amiri" pitchFamily="2" charset="-78"/>
+                <a:ea typeface="Amiri" pitchFamily="2" charset="-78"/>
                 <a:cs typeface="Amiri" pitchFamily="2" charset="-78"/>
               </a:rPr>
               <a:t>م</a:t>
@@ -4243,6 +4286,7 @@
                   <a:srgbClr val="8A6D1E"/>
                 </a:solidFill>
                 <a:latin typeface="Amiri" pitchFamily="2" charset="-78"/>
+                <a:ea typeface="Amiri" pitchFamily="2" charset="-78"/>
                 <a:cs typeface="Amiri" pitchFamily="2" charset="-78"/>
               </a:rPr>
               <a:t>مُكَالَمَةٌ مَعَ صَدِيقٍ فِي الخَارِجِ</a:t>
@@ -4523,6 +4567,7 @@
                   <a:srgbClr val="1B3B6F"/>
                 </a:solidFill>
                 <a:latin typeface="Amiri" pitchFamily="2" charset="-78"/>
+                <a:ea typeface="Amiri" pitchFamily="2" charset="-78"/>
                 <a:cs typeface="Amiri" pitchFamily="2" charset="-78"/>
               </a:rPr>
               <a:t>أَوَّلًا … بِالإِضَافَةِ إِلَى ذٰلِكَ …</a:t>
@@ -4599,6 +4644,7 @@
                   <a:srgbClr val="1B3B6F"/>
                 </a:solidFill>
                 <a:latin typeface="Amiri" pitchFamily="2" charset="-78"/>
+                <a:ea typeface="Amiri" pitchFamily="2" charset="-78"/>
                 <a:cs typeface="Amiri" pitchFamily="2" charset="-78"/>
               </a:rPr>
               <a:t>صِفْ لِي مَدِينَتَكَ.</a:t>
@@ -4702,6 +4748,7 @@
                   <a:srgbClr val="1B3B6F"/>
                 </a:solidFill>
                 <a:latin typeface="Amiri" pitchFamily="2" charset="-78"/>
+                <a:ea typeface="Amiri" pitchFamily="2" charset="-78"/>
                 <a:cs typeface="Amiri" pitchFamily="2" charset="-78"/>
               </a:rPr>
               <a:t>الجَوُّ هُنَا … أَمَّا عِنْدَكُمْ فَالشَّمْسُ …</a:t>
@@ -4778,6 +4825,7 @@
                   <a:srgbClr val="1B3B6F"/>
                 </a:solidFill>
                 <a:latin typeface="Amiri" pitchFamily="2" charset="-78"/>
+                <a:ea typeface="Amiri" pitchFamily="2" charset="-78"/>
                 <a:cs typeface="Amiri" pitchFamily="2" charset="-78"/>
               </a:rPr>
               <a:t>وَكَيْفَ الطَّقْسُ عِنْدَكُمُ الآنَ؟</a:t>
@@ -4881,6 +4929,7 @@
                   <a:srgbClr val="1B3B6F"/>
                 </a:solidFill>
                 <a:latin typeface="Amiri" pitchFamily="2" charset="-78"/>
+                <a:ea typeface="Amiri" pitchFamily="2" charset="-78"/>
                 <a:cs typeface="Amiri" pitchFamily="2" charset="-78"/>
               </a:rPr>
               <a:t>أَتَوَاصَلُ مَعَهُمْ … أَمَّا فِي المَاضِي فَكَانَ …</a:t>
@@ -4957,6 +5006,7 @@
                   <a:srgbClr val="1B3B6F"/>
                 </a:solidFill>
                 <a:latin typeface="Amiri" pitchFamily="2" charset="-78"/>
+                <a:ea typeface="Amiri" pitchFamily="2" charset="-78"/>
                 <a:cs typeface="Amiri" pitchFamily="2" charset="-78"/>
               </a:rPr>
               <a:t>كَيْفَ تَتَوَاصَلُ مَعَ أَقَارِبِكَ فِي الخَارِجِ؟</a:t>
@@ -5060,6 +5110,7 @@
                   <a:srgbClr val="1B3B6F"/>
                 </a:solidFill>
                 <a:latin typeface="Amiri" pitchFamily="2" charset="-78"/>
+                <a:ea typeface="Amiri" pitchFamily="2" charset="-78"/>
                 <a:cs typeface="Amiri" pitchFamily="2" charset="-78"/>
               </a:rPr>
               <a:t>نَعَمْ، … بِسَبَبِ … لِذٰلِكَ …</a:t>
@@ -5136,6 +5187,7 @@
                   <a:srgbClr val="1B3B6F"/>
                 </a:solidFill>
                 <a:latin typeface="Amiri" pitchFamily="2" charset="-78"/>
+                <a:ea typeface="Amiri" pitchFamily="2" charset="-78"/>
                 <a:cs typeface="Amiri" pitchFamily="2" charset="-78"/>
               </a:rPr>
               <a:t>هَلْ هُنَاكَ مَشَاكِلُ بِيئِيَّةٌ فِي مَدِينَتِكَ؟</a:t>
@@ -5239,6 +5291,7 @@
                   <a:srgbClr val="1B3B6F"/>
                 </a:solidFill>
                 <a:latin typeface="Amiri" pitchFamily="2" charset="-78"/>
+                <a:ea typeface="Amiri" pitchFamily="2" charset="-78"/>
                 <a:cs typeface="Amiri" pitchFamily="2" charset="-78"/>
               </a:rPr>
               <a:t>سَأَزُورُكَ فِي … إِذَا …</a:t>
@@ -5315,6 +5368,7 @@
                   <a:srgbClr val="1B3B6F"/>
                 </a:solidFill>
                 <a:latin typeface="Amiri" pitchFamily="2" charset="-78"/>
+                <a:ea typeface="Amiri" pitchFamily="2" charset="-78"/>
                 <a:cs typeface="Amiri" pitchFamily="2" charset="-78"/>
               </a:rPr>
               <a:t>مَتَى سَتَزُورُنِي فِي مَرَّاكُشَ؟</a:t>
@@ -5524,6 +5578,7 @@
                   <a:srgbClr val="D4AF37"/>
                 </a:solidFill>
                 <a:latin typeface="Amiri" pitchFamily="2" charset="-78"/>
+                <a:ea typeface="Amiri" pitchFamily="2" charset="-78"/>
                 <a:cs typeface="Amiri" pitchFamily="2" charset="-78"/>
               </a:rPr>
               <a:t>م</a:t>
@@ -5844,6 +5899,7 @@
                   <a:srgbClr val="8A6D1E"/>
                 </a:solidFill>
                 <a:latin typeface="Amiri" pitchFamily="2" charset="-78"/>
+                <a:ea typeface="Amiri" pitchFamily="2" charset="-78"/>
                 <a:cs typeface="Amiri" pitchFamily="2" charset="-78"/>
               </a:rPr>
               <a:t>مَدِينَةٌ أَفْضَلُ لِلشَّبَابِ</a:t>
@@ -6124,6 +6180,7 @@
                   <a:srgbClr val="1B3B6F"/>
                 </a:solidFill>
                 <a:latin typeface="Amiri" pitchFamily="2" charset="-78"/>
+                <a:ea typeface="Amiri" pitchFamily="2" charset="-78"/>
                 <a:cs typeface="Amiri" pitchFamily="2" charset="-78"/>
               </a:rPr>
               <a:t>أَرَى أَنَّ … بِسَبَبِ … مِمَّا …</a:t>
@@ -6200,6 +6257,7 @@
                   <a:srgbClr val="1B3B6F"/>
                 </a:solidFill>
                 <a:latin typeface="Amiri" pitchFamily="2" charset="-78"/>
+                <a:ea typeface="Amiri" pitchFamily="2" charset="-78"/>
                 <a:cs typeface="Amiri" pitchFamily="2" charset="-78"/>
               </a:rPr>
               <a:t>مَا أَكْبَرُ مُشْكِلَةٍ تُوَاجِهُ الشَّبَابَ فِي مَدِينَتِنَا؟</a:t>
@@ -6303,6 +6361,7 @@
                   <a:srgbClr val="1B3B6F"/>
                 </a:solidFill>
                 <a:latin typeface="Amiri" pitchFamily="2" charset="-78"/>
+                <a:ea typeface="Amiri" pitchFamily="2" charset="-78"/>
                 <a:cs typeface="Amiri" pitchFamily="2" charset="-78"/>
               </a:rPr>
               <a:t>أَقْتَرِحُ أَنْ … لِكَيْ …</a:t>
@@ -6379,6 +6438,7 @@
                   <a:srgbClr val="1B3B6F"/>
                 </a:solidFill>
                 <a:latin typeface="Amiri" pitchFamily="2" charset="-78"/>
+                <a:ea typeface="Amiri" pitchFamily="2" charset="-78"/>
                 <a:cs typeface="Amiri" pitchFamily="2" charset="-78"/>
               </a:rPr>
               <a:t>وَمَا اقْتِرَاحُكَ؟</a:t>
@@ -6482,6 +6542,7 @@
                   <a:srgbClr val="1B3B6F"/>
                 </a:solidFill>
                 <a:latin typeface="Amiri" pitchFamily="2" charset="-78"/>
+                <a:ea typeface="Amiri" pitchFamily="2" charset="-78"/>
                 <a:cs typeface="Amiri" pitchFamily="2" charset="-78"/>
               </a:rPr>
               <a:t>نَعَمْ، فِي العَامِ المَاضِي نَظَّمْتُ … فَجَمَعْنَا …</a:t>
@@ -6558,6 +6619,7 @@
                   <a:srgbClr val="1B3B6F"/>
                 </a:solidFill>
                 <a:latin typeface="Amiri" pitchFamily="2" charset="-78"/>
+                <a:ea typeface="Amiri" pitchFamily="2" charset="-78"/>
                 <a:cs typeface="Amiri" pitchFamily="2" charset="-78"/>
               </a:rPr>
               <a:t>هَلْ لَدَيْكَ خِبْرَةٌ فِي مِثْلِ هٰذِهِ المَشَارِيعِ؟</a:t>
@@ -6661,6 +6723,7 @@
                   <a:srgbClr val="1B3B6F"/>
                 </a:solidFill>
                 <a:latin typeface="Amiri" pitchFamily="2" charset="-78"/>
+                <a:ea typeface="Amiri" pitchFamily="2" charset="-78"/>
                 <a:cs typeface="Amiri" pitchFamily="2" charset="-78"/>
               </a:rPr>
               <a:t>صَحِيحٌ أَنَّ … غَيْرَ أَنَّ …</a:t>
@@ -6737,6 +6800,7 @@
                   <a:srgbClr val="1B3B6F"/>
                 </a:solidFill>
                 <a:latin typeface="Amiri" pitchFamily="2" charset="-78"/>
+                <a:ea typeface="Amiri" pitchFamily="2" charset="-78"/>
                 <a:cs typeface="Amiri" pitchFamily="2" charset="-78"/>
               </a:rPr>
               <a:t>لٰكِنَّ المِيزَانِيَّةَ مَحْدُودَةٌ.</a:t>
@@ -6840,6 +6904,7 @@
                   <a:srgbClr val="1B3B6F"/>
                 </a:solidFill>
                 <a:latin typeface="Amiri" pitchFamily="2" charset="-78"/>
+                <a:ea typeface="Amiri" pitchFamily="2" charset="-78"/>
                 <a:cs typeface="Amiri" pitchFamily="2" charset="-78"/>
               </a:rPr>
               <a:t>لَوِ انْتُخِبْتُ، لَأَجْرَيْتُ …</a:t>
@@ -6916,6 +6981,7 @@
                   <a:srgbClr val="1B3B6F"/>
                 </a:solidFill>
                 <a:latin typeface="Amiri" pitchFamily="2" charset="-78"/>
+                <a:ea typeface="Amiri" pitchFamily="2" charset="-78"/>
                 <a:cs typeface="Amiri" pitchFamily="2" charset="-78"/>
               </a:rPr>
               <a:t>لَوِ انْتُخِبْتَ، مَا أَوَّلُ شَيْءٍ تَفْعَلُهُ؟</a:t>
@@ -7125,6 +7191,7 @@
                   <a:srgbClr val="D4AF37"/>
                 </a:solidFill>
                 <a:latin typeface="Amiri" pitchFamily="2" charset="-78"/>
+                <a:ea typeface="Amiri" pitchFamily="2" charset="-78"/>
                 <a:cs typeface="Amiri" pitchFamily="2" charset="-78"/>
               </a:rPr>
               <a:t>م</a:t>
@@ -7445,6 +7512,7 @@
                   <a:srgbClr val="8A6D1E"/>
                 </a:solidFill>
                 <a:latin typeface="Amiri" pitchFamily="2" charset="-78"/>
+                <a:ea typeface="Amiri" pitchFamily="2" charset="-78"/>
                 <a:cs typeface="Amiri" pitchFamily="2" charset="-78"/>
               </a:rPr>
               <a:t>وَرَقَةُ المُلَاحِظِ</a:t>
@@ -8915,6 +8983,7 @@
                   <a:srgbClr val="D4AF37"/>
                 </a:solidFill>
                 <a:latin typeface="Amiri" pitchFamily="2" charset="-78"/>
+                <a:ea typeface="Amiri" pitchFamily="2" charset="-78"/>
                 <a:cs typeface="Amiri" pitchFamily="2" charset="-78"/>
               </a:rPr>
               <a:t>م</a:t>
@@ -9235,6 +9304,7 @@
                   <a:srgbClr val="8A6D1E"/>
                 </a:solidFill>
                 <a:latin typeface="Amiri" pitchFamily="2" charset="-78"/>
+                <a:ea typeface="Amiri" pitchFamily="2" charset="-78"/>
                 <a:cs typeface="Amiri" pitchFamily="2" charset="-78"/>
               </a:rPr>
               <a:t>نَمُوذَجُ الإِجَابَةِ</a:t>
@@ -9477,6 +9547,7 @@
                   <a:srgbClr val="1B3B6F"/>
                 </a:solidFill>
                 <a:latin typeface="Amiri" pitchFamily="2" charset="-78"/>
+                <a:ea typeface="Amiri" pitchFamily="2" charset="-78"/>
                 <a:cs typeface="Amiri" pitchFamily="2" charset="-78"/>
               </a:rPr>
               <a:t>نَعَمْ، حَجَزْتُ سَرِيرًا لِثَلَاثِ لَيَالٍ.</a:t>
@@ -9553,6 +9624,7 @@
                   <a:srgbClr val="1B3B6F"/>
                 </a:solidFill>
                 <a:latin typeface="Amiri" pitchFamily="2" charset="-78"/>
+                <a:ea typeface="Amiri" pitchFamily="2" charset="-78"/>
                 <a:cs typeface="Amiri" pitchFamily="2" charset="-78"/>
               </a:rPr>
               <a:t>أَهْلًا! هَلْ عِنْدَكَ حَجْزٌ؟</a:t>
@@ -9656,6 +9728,7 @@
                   <a:srgbClr val="1B3B6F"/>
                 </a:solidFill>
                 <a:latin typeface="Amiri" pitchFamily="2" charset="-78"/>
+                <a:ea typeface="Amiri" pitchFamily="2" charset="-78"/>
                 <a:cs typeface="Amiri" pitchFamily="2" charset="-78"/>
               </a:rPr>
               <a:t>كَانَ الجَوُّ بَارِدًا، وَسَقَطَتْ أَمْطَارٌ كَثِيرَةٌ.</a:t>
@@ -9732,6 +9805,7 @@
                   <a:srgbClr val="1B3B6F"/>
                 </a:solidFill>
                 <a:latin typeface="Amiri" pitchFamily="2" charset="-78"/>
+                <a:ea typeface="Amiri" pitchFamily="2" charset="-78"/>
                 <a:cs typeface="Amiri" pitchFamily="2" charset="-78"/>
               </a:rPr>
               <a:t>كَيْفَ كَانَ الطَّقْسُ فِي الطَّرِيقِ؟</a:t>
@@ -9835,6 +9909,7 @@
                   <a:srgbClr val="1B3B6F"/>
                 </a:solidFill>
                 <a:latin typeface="Amiri" pitchFamily="2" charset="-78"/>
+                <a:ea typeface="Amiri" pitchFamily="2" charset="-78"/>
                 <a:cs typeface="Amiri" pitchFamily="2" charset="-78"/>
               </a:rPr>
               <a:t>أُرِيدُ أَنْ أَزُورَ المَتْحَفَ وَالسُّوقَ القَدِيمَ.</a:t>
@@ -9911,6 +9986,7 @@
                   <a:srgbClr val="1B3B6F"/>
                 </a:solidFill>
                 <a:latin typeface="Amiri" pitchFamily="2" charset="-78"/>
+                <a:ea typeface="Amiri" pitchFamily="2" charset="-78"/>
                 <a:cs typeface="Amiri" pitchFamily="2" charset="-78"/>
               </a:rPr>
               <a:t>مَاذَا تُرِيدُ أَنْ تَزُورَ فِي المَدِينَةِ؟</a:t>
@@ -10014,6 +10090,7 @@
                   <a:srgbClr val="1B3B6F"/>
                 </a:solidFill>
                 <a:latin typeface="Amiri" pitchFamily="2" charset="-78"/>
+                <a:ea typeface="Amiri" pitchFamily="2" charset="-78"/>
                 <a:cs typeface="Amiri" pitchFamily="2" charset="-78"/>
               </a:rPr>
               <a:t>مَا كَلِمَةُ السِّرِّ مِنْ فَضْلِكَ؟</a:t>
@@ -10090,6 +10167,7 @@
                   <a:srgbClr val="1B3B6F"/>
                 </a:solidFill>
                 <a:latin typeface="Amiri" pitchFamily="2" charset="-78"/>
+                <a:ea typeface="Amiri" pitchFamily="2" charset="-78"/>
                 <a:cs typeface="Amiri" pitchFamily="2" charset="-78"/>
               </a:rPr>
               <a:t>عِنْدَنَا إِنْتَرْنِتٌ مَجَّانِيٌّ.</a:t>
@@ -10193,6 +10271,7 @@
                   <a:srgbClr val="1B3B6F"/>
                 </a:solidFill>
                 <a:latin typeface="Amiri" pitchFamily="2" charset="-78"/>
+                <a:ea typeface="Amiri" pitchFamily="2" charset="-78"/>
                 <a:cs typeface="Amiri" pitchFamily="2" charset="-78"/>
               </a:rPr>
               <a:t>نَعَمْ، أُعِيدُ تَدْوِيرَ الوَرَقِ وَالبْلَاسْتِيكِ فِي البَيْتِ دَائِمًا.</a:t>
@@ -10269,6 +10348,7 @@
                   <a:srgbClr val="1B3B6F"/>
                 </a:solidFill>
                 <a:latin typeface="Amiri" pitchFamily="2" charset="-78"/>
+                <a:ea typeface="Amiri" pitchFamily="2" charset="-78"/>
                 <a:cs typeface="Amiri" pitchFamily="2" charset="-78"/>
               </a:rPr>
               <a:t>هَلْ تُعِيدُ التَّدْوِيرَ؟ عِنْدَنَا ثَلَاثُ سَلَّاتٍ.</a:t>
@@ -10478,6 +10558,7 @@
                   <a:srgbClr val="D4AF37"/>
                 </a:solidFill>
                 <a:latin typeface="Amiri" pitchFamily="2" charset="-78"/>
+                <a:ea typeface="Amiri" pitchFamily="2" charset="-78"/>
                 <a:cs typeface="Amiri" pitchFamily="2" charset="-78"/>
               </a:rPr>
               <a:t>م</a:t>
@@ -10798,6 +10879,7 @@
                   <a:srgbClr val="8A6D1E"/>
                 </a:solidFill>
                 <a:latin typeface="Amiri" pitchFamily="2" charset="-78"/>
+                <a:ea typeface="Amiri" pitchFamily="2" charset="-78"/>
                 <a:cs typeface="Amiri" pitchFamily="2" charset="-78"/>
               </a:rPr>
               <a:t>نَمُوذَجُ الإِجَابَةِ</a:t>
@@ -11040,6 +11122,7 @@
                   <a:srgbClr val="1B3B6F"/>
                 </a:solidFill>
                 <a:latin typeface="Amiri" pitchFamily="2" charset="-78"/>
+                <a:ea typeface="Amiri" pitchFamily="2" charset="-78"/>
                 <a:cs typeface="Amiri" pitchFamily="2" charset="-78"/>
               </a:rPr>
               <a:t>نُرِيدُ أَنْ نَذْهَبَ إِلَى الحَدِيقَةِ الوَطَنِيَّةِ، لِأَنَّ الطَّبِيعَةَ هُنَاكَ جَمِيلَةٌ.</a:t>
@@ -11116,6 +11199,7 @@
                   <a:srgbClr val="1B3B6F"/>
                 </a:solidFill>
                 <a:latin typeface="Amiri" pitchFamily="2" charset="-78"/>
+                <a:ea typeface="Amiri" pitchFamily="2" charset="-78"/>
                 <a:cs typeface="Amiri" pitchFamily="2" charset="-78"/>
               </a:rPr>
               <a:t>أَيْنَ تُرِيدُونَ أَنْ تَذْهَبُوا؟</a:t>
@@ -11219,6 +11303,7 @@
                   <a:srgbClr val="1B3B6F"/>
                 </a:solidFill>
                 <a:latin typeface="Amiri" pitchFamily="2" charset="-78"/>
+                <a:ea typeface="Amiri" pitchFamily="2" charset="-78"/>
                 <a:cs typeface="Amiri" pitchFamily="2" charset="-78"/>
               </a:rPr>
               <a:t>بِالقِطَارِ، لِأَنَّهُ أَسْرَعُ وَأَنْظَفُ لِلْبِيئَةِ مِنَ الحَافِلَةِ.</a:t>
@@ -11295,6 +11380,7 @@
                   <a:srgbClr val="1B3B6F"/>
                 </a:solidFill>
                 <a:latin typeface="Amiri" pitchFamily="2" charset="-78"/>
+                <a:ea typeface="Amiri" pitchFamily="2" charset="-78"/>
                 <a:cs typeface="Amiri" pitchFamily="2" charset="-78"/>
               </a:rPr>
               <a:t>وَكَيْفَ نَذْهَبُ؟</a:t>
@@ -11398,6 +11484,7 @@
                   <a:srgbClr val="1B3B6F"/>
                 </a:solidFill>
                 <a:latin typeface="Amiri" pitchFamily="2" charset="-78"/>
+                <a:ea typeface="Amiri" pitchFamily="2" charset="-78"/>
                 <a:cs typeface="Amiri" pitchFamily="2" charset="-78"/>
               </a:rPr>
               <a:t>وَإِذَا أَمْطَرَتْ، هَلْ يُمْكِنُ أَنْ نَزُورَ مَرْكَزَ الزُّوَّارِ بَدَلًا مِنَ المَشْيِ؟</a:t>
@@ -11474,6 +11561,7 @@
                   <a:srgbClr val="1B3B6F"/>
                 </a:solidFill>
                 <a:latin typeface="Amiri" pitchFamily="2" charset="-78"/>
+                <a:ea typeface="Amiri" pitchFamily="2" charset="-78"/>
                 <a:cs typeface="Amiri" pitchFamily="2" charset="-78"/>
               </a:rPr>
               <a:t>لٰكِنْ قَدْ يَكُونُ الجَوُّ مُمْطِرًا.</a:t>
@@ -11577,6 +11665,7 @@
                   <a:srgbClr val="1B3B6F"/>
                 </a:solidFill>
                 <a:latin typeface="Amiri" pitchFamily="2" charset="-78"/>
+                <a:ea typeface="Amiri" pitchFamily="2" charset="-78"/>
                 <a:cs typeface="Amiri" pitchFamily="2" charset="-78"/>
               </a:rPr>
               <a:t>مِنْ نَاحِيَةٍ، نَحْتَاجُهَا لِلصُّوَرِ وَالخَرَائِطِ، وَمِنْ نَاحِيَةٍ أُخْرَى، يَجِبُ أَنْ نَسْتَمْتِعَ بِالطَّبِيعَةِ.</a:t>
@@ -11653,6 +11742,7 @@
                   <a:srgbClr val="1B3B6F"/>
                 </a:solidFill>
                 <a:latin typeface="Amiri" pitchFamily="2" charset="-78"/>
+                <a:ea typeface="Amiri" pitchFamily="2" charset="-78"/>
                 <a:cs typeface="Amiri" pitchFamily="2" charset="-78"/>
               </a:rPr>
               <a:t>فِكْرَةٌ جَيِّدَةٌ. وَالهَوَاتِفُ؟</a:t>
@@ -11756,6 +11846,7 @@
                   <a:srgbClr val="1B3B6F"/>
                 </a:solidFill>
                 <a:latin typeface="Amiri" pitchFamily="2" charset="-78"/>
+                <a:ea typeface="Amiri" pitchFamily="2" charset="-78"/>
                 <a:cs typeface="Amiri" pitchFamily="2" charset="-78"/>
               </a:rPr>
               <a:t>ذَهَبْنَا إِلَى مَتْحَفِ العُلُومِ فِي لَنْدَنَ، وَتَعَلَّمْنَا كَثِيرًا عَنِ الفَضَاءِ.</a:t>
@@ -11832,6 +11923,7 @@
                   <a:srgbClr val="1B3B6F"/>
                 </a:solidFill>
                 <a:latin typeface="Amiri" pitchFamily="2" charset="-78"/>
+                <a:ea typeface="Amiri" pitchFamily="2" charset="-78"/>
                 <a:cs typeface="Amiri" pitchFamily="2" charset="-78"/>
               </a:rPr>
               <a:t>مَاذَا فَعَلْتُمْ فِي رِحْلَةِ السَّنَةِ المَاضِيَةِ؟</a:t>
@@ -12041,6 +12133,7 @@
                   <a:srgbClr val="D4AF37"/>
                 </a:solidFill>
                 <a:latin typeface="Amiri" pitchFamily="2" charset="-78"/>
+                <a:ea typeface="Amiri" pitchFamily="2" charset="-78"/>
                 <a:cs typeface="Amiri" pitchFamily="2" charset="-78"/>
               </a:rPr>
               <a:t>م</a:t>
@@ -12361,6 +12454,7 @@
                   <a:srgbClr val="8A6D1E"/>
                 </a:solidFill>
                 <a:latin typeface="Amiri" pitchFamily="2" charset="-78"/>
+                <a:ea typeface="Amiri" pitchFamily="2" charset="-78"/>
                 <a:cs typeface="Amiri" pitchFamily="2" charset="-78"/>
               </a:rPr>
               <a:t>نَمُوذَجُ الإِجَابَةِ</a:t>
@@ -12603,6 +12697,7 @@
                   <a:srgbClr val="1B3B6F"/>
                 </a:solidFill>
                 <a:latin typeface="Amiri" pitchFamily="2" charset="-78"/>
+                <a:ea typeface="Amiri" pitchFamily="2" charset="-78"/>
                 <a:cs typeface="Amiri" pitchFamily="2" charset="-78"/>
               </a:rPr>
               <a:t>أَوَّلًا، مَدِينَتِي كَبِيرَةٌ وَمُزْدَحِمَةٌ؛ بِالإِضَافَةِ إِلَى ذٰلِكَ، تُوجَدُ فِيهَا حَدَائِقُ كَثِيرَةٌ وَمَكْتَبَةٌ حَدِيثَةٌ.</a:t>
@@ -12679,6 +12774,7 @@
                   <a:srgbClr val="1B3B6F"/>
                 </a:solidFill>
                 <a:latin typeface="Amiri" pitchFamily="2" charset="-78"/>
+                <a:ea typeface="Amiri" pitchFamily="2" charset="-78"/>
                 <a:cs typeface="Amiri" pitchFamily="2" charset="-78"/>
               </a:rPr>
               <a:t>صِفْ لِي مَدِينَتَكَ.</a:t>
@@ -12782,6 +12878,7 @@
                   <a:srgbClr val="1B3B6F"/>
                 </a:solidFill>
                 <a:latin typeface="Amiri" pitchFamily="2" charset="-78"/>
+                <a:ea typeface="Amiri" pitchFamily="2" charset="-78"/>
                 <a:cs typeface="Amiri" pitchFamily="2" charset="-78"/>
               </a:rPr>
               <a:t>الجَوُّ هُنَا بَارِدٌ وَغَائِمٌ، أَمَّا عِنْدَكُمْ فَالشَّمْسُ مُشْرِقَةٌ، فَأَنْتُمْ أَسْعَدُ مِنَّا!</a:t>
@@ -12858,6 +12955,7 @@
                   <a:srgbClr val="1B3B6F"/>
                 </a:solidFill>
                 <a:latin typeface="Amiri" pitchFamily="2" charset="-78"/>
+                <a:ea typeface="Amiri" pitchFamily="2" charset="-78"/>
                 <a:cs typeface="Amiri" pitchFamily="2" charset="-78"/>
               </a:rPr>
               <a:t>وَكَيْفَ الطَّقْسُ عِنْدَكُمُ الآنَ؟</a:t>
@@ -12961,6 +13059,7 @@
                   <a:srgbClr val="1B3B6F"/>
                 </a:solidFill>
                 <a:latin typeface="Amiri" pitchFamily="2" charset="-78"/>
+                <a:ea typeface="Amiri" pitchFamily="2" charset="-78"/>
                 <a:cs typeface="Amiri" pitchFamily="2" charset="-78"/>
               </a:rPr>
               <a:t>أَتَوَاصَلُ مَعَهُمْ بِالفِيدْيُو كُلَّ أُسْبُوعٍ، أَمَّا فِي المَاضِي فَكَانَ أَبِي يَكْتُبُ لَهُمْ رَسَائِلَ تَصِلُ بَعْدَ أَسَابِيعَ.</a:t>
@@ -13037,6 +13136,7 @@
                   <a:srgbClr val="1B3B6F"/>
                 </a:solidFill>
                 <a:latin typeface="Amiri" pitchFamily="2" charset="-78"/>
+                <a:ea typeface="Amiri" pitchFamily="2" charset="-78"/>
                 <a:cs typeface="Amiri" pitchFamily="2" charset="-78"/>
               </a:rPr>
               <a:t>كَيْفَ تَتَوَاصَلُ مَعَ أَقَارِبِكَ فِي الخَارِجِ؟</a:t>
@@ -13140,6 +13240,7 @@
                   <a:srgbClr val="1B3B6F"/>
                 </a:solidFill>
                 <a:latin typeface="Amiri" pitchFamily="2" charset="-78"/>
+                <a:ea typeface="Amiri" pitchFamily="2" charset="-78"/>
                 <a:cs typeface="Amiri" pitchFamily="2" charset="-78"/>
               </a:rPr>
               <a:t>نَعَمْ، الهَوَاءُ مُلَوَّثٌ بِسَبَبِ زَحْمَةِ السَّيَّارَاتِ، لِذٰلِكَ أَذْهَبُ إِلَى المَدْرَسَةِ بِالدَّرَّاجَةِ.</a:t>
@@ -13216,6 +13317,7 @@
                   <a:srgbClr val="1B3B6F"/>
                 </a:solidFill>
                 <a:latin typeface="Amiri" pitchFamily="2" charset="-78"/>
+                <a:ea typeface="Amiri" pitchFamily="2" charset="-78"/>
                 <a:cs typeface="Amiri" pitchFamily="2" charset="-78"/>
               </a:rPr>
               <a:t>هَلْ هُنَاكَ مَشَاكِلُ بِيئِيَّةٌ فِي مَدِينَتِكَ؟</a:t>
@@ -13319,6 +13421,7 @@
                   <a:srgbClr val="1B3B6F"/>
                 </a:solidFill>
                 <a:latin typeface="Amiri" pitchFamily="2" charset="-78"/>
+                <a:ea typeface="Amiri" pitchFamily="2" charset="-78"/>
                 <a:cs typeface="Amiri" pitchFamily="2" charset="-78"/>
               </a:rPr>
               <a:t>سَأَزُورُكَ فِي الرَّبِيعِ القَادِمِ إِذَا وَجَدْتُ تَذْكِرَةً رَخِيصَةً، لِأَنَّ الجَوَّ سَيَكُونُ مُعْتَدِلًا.</a:t>
@@ -13395,6 +13498,7 @@
                   <a:srgbClr val="1B3B6F"/>
                 </a:solidFill>
                 <a:latin typeface="Amiri" pitchFamily="2" charset="-78"/>
+                <a:ea typeface="Amiri" pitchFamily="2" charset="-78"/>
                 <a:cs typeface="Amiri" pitchFamily="2" charset="-78"/>
               </a:rPr>
               <a:t>مَتَى سَتَزُورُنِي فِي مَرَّاكُشَ؟</a:t>
@@ -13604,6 +13708,7 @@
                   <a:srgbClr val="D4AF37"/>
                 </a:solidFill>
                 <a:latin typeface="Amiri" pitchFamily="2" charset="-78"/>
+                <a:ea typeface="Amiri" pitchFamily="2" charset="-78"/>
                 <a:cs typeface="Amiri" pitchFamily="2" charset="-78"/>
               </a:rPr>
               <a:t>م</a:t>
@@ -13924,6 +14029,7 @@
                   <a:srgbClr val="8A6D1E"/>
                 </a:solidFill>
                 <a:latin typeface="Amiri" pitchFamily="2" charset="-78"/>
+                <a:ea typeface="Amiri" pitchFamily="2" charset="-78"/>
                 <a:cs typeface="Amiri" pitchFamily="2" charset="-78"/>
               </a:rPr>
               <a:t>نَمُوذَجُ الإِجَابَةِ</a:t>
@@ -14166,6 +14272,7 @@
                   <a:srgbClr val="1B3B6F"/>
                 </a:solidFill>
                 <a:latin typeface="Amiri" pitchFamily="2" charset="-78"/>
+                <a:ea typeface="Amiri" pitchFamily="2" charset="-78"/>
                 <a:cs typeface="Amiri" pitchFamily="2" charset="-78"/>
               </a:rPr>
               <a:t>أَرَى أَنَّ أَكْبَرَهَا قِلَّةُ الأَمَاكِنِ الآمِنَةِ لِلِقَاءِ، بِسَبَبِ إِغْلَاقِ المَرَاكِزِ الشَّبَابِيَّةِ، مِمَّا يَدْفَعُ الشَّبَابَ إِلَى الشَّاشَاتِ.</a:t>
@@ -14242,6 +14349,7 @@
                   <a:srgbClr val="1B3B6F"/>
                 </a:solidFill>
                 <a:latin typeface="Amiri" pitchFamily="2" charset="-78"/>
+                <a:ea typeface="Amiri" pitchFamily="2" charset="-78"/>
                 <a:cs typeface="Amiri" pitchFamily="2" charset="-78"/>
               </a:rPr>
               <a:t>مَا أَكْبَرُ مُشْكِلَةٍ تُوَاجِهُ الشَّبَابَ فِي مَدِينَتِنَا؟</a:t>
@@ -14345,6 +14453,7 @@
                   <a:srgbClr val="1B3B6F"/>
                 </a:solidFill>
                 <a:latin typeface="Amiri" pitchFamily="2" charset="-78"/>
+                <a:ea typeface="Amiri" pitchFamily="2" charset="-78"/>
                 <a:cs typeface="Amiri" pitchFamily="2" charset="-78"/>
               </a:rPr>
               <a:t>أَقْتَرِحُ أَنْ يُبْنَى مَرْكَزٌ أَخْضَرُ بِأَلْوَاحٍ شَمْسِيَّةٍ، فِيهِ مُخْتَبَرٌ رَقْمِيٌّ وَحَدِيقَةٌ، لِكَيْ يَتَعَلَّمَ الشَّبَابُ وَيَلْتَقُوا.</a:t>
@@ -14421,6 +14530,7 @@
                   <a:srgbClr val="1B3B6F"/>
                 </a:solidFill>
                 <a:latin typeface="Amiri" pitchFamily="2" charset="-78"/>
+                <a:ea typeface="Amiri" pitchFamily="2" charset="-78"/>
                 <a:cs typeface="Amiri" pitchFamily="2" charset="-78"/>
               </a:rPr>
               <a:t>وَمَا اقْتِرَاحُكَ؟</a:t>
@@ -14524,6 +14634,7 @@
                   <a:srgbClr val="1B3B6F"/>
                 </a:solidFill>
                 <a:latin typeface="Amiri" pitchFamily="2" charset="-78"/>
+                <a:ea typeface="Amiri" pitchFamily="2" charset="-78"/>
                 <a:cs typeface="Amiri" pitchFamily="2" charset="-78"/>
               </a:rPr>
               <a:t>نَعَمْ، فِي العَامِ المَاضِي نَظَّمْتُ مَعَ زُمَلَائِي سُوقًا لِلْأَجْهِزَةِ المُسْتَعْمَلَةِ، فَجَمَعْنَا خَمْسَمِئَةِ جُنَيْهٍ لِلْمَدْرَسَةِ.</a:t>
@@ -14600,6 +14711,7 @@
                   <a:srgbClr val="1B3B6F"/>
                 </a:solidFill>
                 <a:latin typeface="Amiri" pitchFamily="2" charset="-78"/>
+                <a:ea typeface="Amiri" pitchFamily="2" charset="-78"/>
                 <a:cs typeface="Amiri" pitchFamily="2" charset="-78"/>
               </a:rPr>
               <a:t>هَلْ لَدَيْكَ خِبْرَةٌ فِي مِثْلِ هٰذِهِ المَشَارِيعِ؟</a:t>
@@ -14703,6 +14815,7 @@
                   <a:srgbClr val="1B3B6F"/>
                 </a:solidFill>
                 <a:latin typeface="Amiri" pitchFamily="2" charset="-78"/>
+                <a:ea typeface="Amiri" pitchFamily="2" charset="-78"/>
                 <a:cs typeface="Amiri" pitchFamily="2" charset="-78"/>
               </a:rPr>
               <a:t>صَحِيحٌ أَنَّ المِيزَانِيَّةَ مَحْدُودَةٌ، غَيْرَ أَنَّ الأَلْوَاحَ الشَّمْسِيَّةَ سَتُوَفِّرُ تَكَالِيفَ الكَهْرَبَاءِ، وَقَدْ تَدْعَمُنَا الشَّرِكَاتُ المَحَلِّيَّةُ.</a:t>
@@ -14779,6 +14892,7 @@
                   <a:srgbClr val="1B3B6F"/>
                 </a:solidFill>
                 <a:latin typeface="Amiri" pitchFamily="2" charset="-78"/>
+                <a:ea typeface="Amiri" pitchFamily="2" charset="-78"/>
                 <a:cs typeface="Amiri" pitchFamily="2" charset="-78"/>
               </a:rPr>
               <a:t>لٰكِنَّ المِيزَانِيَّةَ مَحْدُودَةٌ.</a:t>
@@ -14882,6 +14996,7 @@
                   <a:srgbClr val="1B3B6F"/>
                 </a:solidFill>
                 <a:latin typeface="Amiri" pitchFamily="2" charset="-78"/>
+                <a:ea typeface="Amiri" pitchFamily="2" charset="-78"/>
                 <a:cs typeface="Amiri" pitchFamily="2" charset="-78"/>
               </a:rPr>
               <a:t>لَوِ انْتُخِبْتُ، لَأَجْرَيْتُ اسْتِطْلَاعًا إِلِكْتْرُونِيًّا لِكُلِّ طُلَّابِ المَدِينَةِ، لِأَعْرِفَ مَا يَحْتَاجُونَ إِلَيْهِ حَقًّا.</a:t>
@@ -14958,6 +15073,7 @@
                   <a:srgbClr val="1B3B6F"/>
                 </a:solidFill>
                 <a:latin typeface="Amiri" pitchFamily="2" charset="-78"/>
+                <a:ea typeface="Amiri" pitchFamily="2" charset="-78"/>
                 <a:cs typeface="Amiri" pitchFamily="2" charset="-78"/>
               </a:rPr>
               <a:t>لَوِ انْتُخِبْتَ، مَا أَوَّلُ شَيْءٍ تَفْعَلُهُ؟</a:t>
@@ -15167,6 +15283,7 @@
                   <a:srgbClr val="D4AF37"/>
                 </a:solidFill>
                 <a:latin typeface="Amiri" pitchFamily="2" charset="-78"/>
+                <a:ea typeface="Amiri" pitchFamily="2" charset="-78"/>
                 <a:cs typeface="Amiri" pitchFamily="2" charset="-78"/>
               </a:rPr>
               <a:t>م</a:t>
@@ -15487,6 +15604,7 @@
                   <a:srgbClr val="8A6D1E"/>
                 </a:solidFill>
                 <a:latin typeface="Amiri" pitchFamily="2" charset="-78"/>
+                <a:ea typeface="Amiri" pitchFamily="2" charset="-78"/>
                 <a:cs typeface="Amiri" pitchFamily="2" charset="-78"/>
               </a:rPr>
               <a:t>العَالَمُ حَوْلِي</a:t>
@@ -15767,6 +15885,7 @@
                   <a:srgbClr val="1B3B6F"/>
                 </a:solidFill>
                 <a:latin typeface="Amiri" pitchFamily="2" charset="-78"/>
+                <a:ea typeface="Amiri" pitchFamily="2" charset="-78"/>
                 <a:cs typeface="Amiri" pitchFamily="2" charset="-78"/>
               </a:rPr>
               <a:t>الجَوُّ اليَوْمَ …</a:t>
@@ -15843,6 +15962,7 @@
                   <a:srgbClr val="1B3B6F"/>
                 </a:solidFill>
                 <a:latin typeface="Amiri" pitchFamily="2" charset="-78"/>
+                <a:ea typeface="Amiri" pitchFamily="2" charset="-78"/>
                 <a:cs typeface="Amiri" pitchFamily="2" charset="-78"/>
               </a:rPr>
               <a:t>كَيْفَ الطَّقْسُ اليَوْمَ؟</a:t>
@@ -16011,6 +16131,7 @@
                   <a:srgbClr val="1B3B6F"/>
                 </a:solidFill>
                 <a:latin typeface="Amiri" pitchFamily="2" charset="-78"/>
+                <a:ea typeface="Amiri" pitchFamily="2" charset="-78"/>
                 <a:cs typeface="Amiri" pitchFamily="2" charset="-78"/>
               </a:rPr>
               <a:t>يُوجَدُ … وَتُوجَدُ …</a:t>
@@ -16087,6 +16208,7 @@
                   <a:srgbClr val="1B3B6F"/>
                 </a:solidFill>
                 <a:latin typeface="Amiri" pitchFamily="2" charset="-78"/>
+                <a:ea typeface="Amiri" pitchFamily="2" charset="-78"/>
                 <a:cs typeface="Amiri" pitchFamily="2" charset="-78"/>
               </a:rPr>
               <a:t>مَاذَا يُوجَدُ فِي مَدِينَتِكَ؟</a:t>
@@ -16255,6 +16377,7 @@
                   <a:srgbClr val="1B3B6F"/>
                 </a:solidFill>
                 <a:latin typeface="Amiri" pitchFamily="2" charset="-78"/>
+                <a:ea typeface="Amiri" pitchFamily="2" charset="-78"/>
                 <a:cs typeface="Amiri" pitchFamily="2" charset="-78"/>
               </a:rPr>
               <a:t>أُعِيدُ … / أُطْفِئُ …</a:t>
@@ -16331,6 +16454,7 @@
                   <a:srgbClr val="1B3B6F"/>
                 </a:solidFill>
                 <a:latin typeface="Amiri" pitchFamily="2" charset="-78"/>
+                <a:ea typeface="Amiri" pitchFamily="2" charset="-78"/>
                 <a:cs typeface="Amiri" pitchFamily="2" charset="-78"/>
               </a:rPr>
               <a:t>كَيْفَ تَحْمِي البِيئَةَ؟</a:t>
@@ -16499,6 +16623,7 @@
                   <a:srgbClr val="1B3B6F"/>
                 </a:solidFill>
                 <a:latin typeface="Amiri" pitchFamily="2" charset="-78"/>
+                <a:ea typeface="Amiri" pitchFamily="2" charset="-78"/>
                 <a:cs typeface="Amiri" pitchFamily="2" charset="-78"/>
               </a:rPr>
               <a:t>تَطْبِيقِي المُفَضَّلُ … لِأَنَّ …</a:t>
@@ -16575,6 +16700,7 @@
                   <a:srgbClr val="1B3B6F"/>
                 </a:solidFill>
                 <a:latin typeface="Amiri" pitchFamily="2" charset="-78"/>
+                <a:ea typeface="Amiri" pitchFamily="2" charset="-78"/>
                 <a:cs typeface="Amiri" pitchFamily="2" charset="-78"/>
               </a:rPr>
               <a:t>مَا تَطْبِيقُكَ المُفَضَّلُ؟</a:t>
@@ -16743,6 +16869,7 @@
                   <a:srgbClr val="1B3B6F"/>
                 </a:solidFill>
                 <a:latin typeface="Amiri" pitchFamily="2" charset="-78"/>
+                <a:ea typeface="Amiri" pitchFamily="2" charset="-78"/>
                 <a:cs typeface="Amiri" pitchFamily="2" charset="-78"/>
               </a:rPr>
               <a:t>فَصْلِي المُفَضَّلُ … لِأَنَّ …</a:t>
@@ -16819,6 +16946,7 @@
                   <a:srgbClr val="1B3B6F"/>
                 </a:solidFill>
                 <a:latin typeface="Amiri" pitchFamily="2" charset="-78"/>
+                <a:ea typeface="Amiri" pitchFamily="2" charset="-78"/>
                 <a:cs typeface="Amiri" pitchFamily="2" charset="-78"/>
               </a:rPr>
               <a:t>مَا فَصْلُكَ المُفَضَّلُ؟</a:t>
@@ -16973,6 +17101,7 @@
                   <a:srgbClr val="1B3B6F"/>
                 </a:solidFill>
                 <a:latin typeface="Amiri" pitchFamily="2" charset="-78"/>
+                <a:ea typeface="Amiri" pitchFamily="2" charset="-78"/>
                 <a:cs typeface="Amiri" pitchFamily="2" charset="-78"/>
               </a:rPr>
               <a:t>عَفْوًا، هَلْ يُمْكِنُ أَنْ تُعِيدَ السُّؤَالَ؟</a:t>
@@ -17106,6 +17235,7 @@
                   <a:srgbClr val="D4AF37"/>
                 </a:solidFill>
                 <a:latin typeface="Amiri" pitchFamily="2" charset="-78"/>
+                <a:ea typeface="Amiri" pitchFamily="2" charset="-78"/>
                 <a:cs typeface="Amiri" pitchFamily="2" charset="-78"/>
               </a:rPr>
               <a:t>م</a:t>
@@ -17426,6 +17556,7 @@
                   <a:srgbClr val="8A6D1E"/>
                 </a:solidFill>
                 <a:latin typeface="Amiri" pitchFamily="2" charset="-78"/>
+                <a:ea typeface="Amiri" pitchFamily="2" charset="-78"/>
                 <a:cs typeface="Amiri" pitchFamily="2" charset="-78"/>
               </a:rPr>
               <a:t>أَرْبَعَةُ مَوْضُوعَاتٍ</a:t>
@@ -17706,6 +17837,7 @@
                   <a:srgbClr val="1B3B6F"/>
                 </a:solidFill>
                 <a:latin typeface="Amiri" pitchFamily="2" charset="-78"/>
+                <a:ea typeface="Amiri" pitchFamily="2" charset="-78"/>
                 <a:cs typeface="Amiri" pitchFamily="2" charset="-78"/>
               </a:rPr>
               <a:t>فِي … ذَهَبْنَا إِلَى … لٰكِنْ … لِذٰلِكَ قَضَيْنَا …</a:t>
@@ -17782,6 +17914,7 @@
                   <a:srgbClr val="1B3B6F"/>
                 </a:solidFill>
                 <a:latin typeface="Amiri" pitchFamily="2" charset="-78"/>
+                <a:ea typeface="Amiri" pitchFamily="2" charset="-78"/>
                 <a:cs typeface="Amiri" pitchFamily="2" charset="-78"/>
               </a:rPr>
               <a:t>صِفْ رِحْلَةً تَأَثَّرَتْ بِالطَّقْسِ.</a:t>
@@ -17885,6 +18018,7 @@
                   <a:srgbClr val="1B3B6F"/>
                 </a:solidFill>
                 <a:latin typeface="Amiri" pitchFamily="2" charset="-78"/>
+                <a:ea typeface="Amiri" pitchFamily="2" charset="-78"/>
                 <a:cs typeface="Amiri" pitchFamily="2" charset="-78"/>
               </a:rPr>
               <a:t>كَانَ هُنَاكَ … أَمَّا الآنَ فَتُوجَدُ …</a:t>
@@ -17961,6 +18095,7 @@
                   <a:srgbClr val="1B3B6F"/>
                 </a:solidFill>
                 <a:latin typeface="Amiri" pitchFamily="2" charset="-78"/>
+                <a:ea typeface="Amiri" pitchFamily="2" charset="-78"/>
                 <a:cs typeface="Amiri" pitchFamily="2" charset="-78"/>
               </a:rPr>
               <a:t>كَيْفَ تَغَيَّرَتْ مَدِينَتُكَ؟</a:t>
@@ -18064,6 +18199,7 @@
                   <a:srgbClr val="1B3B6F"/>
                 </a:solidFill>
                 <a:latin typeface="Amiri" pitchFamily="2" charset="-78"/>
+                <a:ea typeface="Amiri" pitchFamily="2" charset="-78"/>
                 <a:cs typeface="Amiri" pitchFamily="2" charset="-78"/>
               </a:rPr>
               <a:t>نَعَمْ، فَمَثَلًا … مَعَ ذٰلِكَ …</a:t>
@@ -18140,6 +18276,7 @@
                   <a:srgbClr val="1B3B6F"/>
                 </a:solidFill>
                 <a:latin typeface="Amiri" pitchFamily="2" charset="-78"/>
+                <a:ea typeface="Amiri" pitchFamily="2" charset="-78"/>
                 <a:cs typeface="Amiri" pitchFamily="2" charset="-78"/>
               </a:rPr>
               <a:t>هَلْ تُسَاعِدُ التِّكْنُولُوجْيَا البِيئَةَ؟</a:t>
@@ -18243,6 +18380,7 @@
                   <a:srgbClr val="1B3B6F"/>
                 </a:solidFill>
                 <a:latin typeface="Amiri" pitchFamily="2" charset="-78"/>
+                <a:ea typeface="Amiri" pitchFamily="2" charset="-78"/>
                 <a:cs typeface="Amiri" pitchFamily="2" charset="-78"/>
               </a:rPr>
               <a:t>أُفَضِّلُ … لِأَنَّ … بِالإِضَافَةِ إِلَى ذٰلِكَ …</a:t>
@@ -18319,6 +18457,7 @@
                   <a:srgbClr val="1B3B6F"/>
                 </a:solidFill>
                 <a:latin typeface="Amiri" pitchFamily="2" charset="-78"/>
+                <a:ea typeface="Amiri" pitchFamily="2" charset="-78"/>
                 <a:cs typeface="Amiri" pitchFamily="2" charset="-78"/>
               </a:rPr>
               <a:t>أَيْنَ تُفَضِّلُ أَنْ تَسْكُنَ: فِي المَدِينَةِ أَمْ فِي الرِّيفِ؟</a:t>
@@ -18422,6 +18561,7 @@
                   <a:srgbClr val="1B3B6F"/>
                 </a:solidFill>
                 <a:latin typeface="Amiri" pitchFamily="2" charset="-78"/>
+                <a:ea typeface="Amiri" pitchFamily="2" charset="-78"/>
                 <a:cs typeface="Amiri" pitchFamily="2" charset="-78"/>
               </a:rPr>
               <a:t>سَأُسَافِرُ إِلَى … وَسَأَحْجِزُ …</a:t>
@@ -18498,6 +18638,7 @@
                   <a:srgbClr val="1B3B6F"/>
                 </a:solidFill>
                 <a:latin typeface="Amiri" pitchFamily="2" charset="-78"/>
+                <a:ea typeface="Amiri" pitchFamily="2" charset="-78"/>
                 <a:cs typeface="Amiri" pitchFamily="2" charset="-78"/>
               </a:rPr>
               <a:t>مَاذَا سَتَفْعَلُ فِي العُطْلَةِ القَادِمَةِ؟</a:t>
@@ -18707,6 +18848,7 @@
                   <a:srgbClr val="D4AF37"/>
                 </a:solidFill>
                 <a:latin typeface="Amiri" pitchFamily="2" charset="-78"/>
+                <a:ea typeface="Amiri" pitchFamily="2" charset="-78"/>
                 <a:cs typeface="Amiri" pitchFamily="2" charset="-78"/>
               </a:rPr>
               <a:t>م</a:t>
@@ -19027,6 +19169,7 @@
                   <a:srgbClr val="8A6D1E"/>
                 </a:solidFill>
                 <a:latin typeface="Amiri" pitchFamily="2" charset="-78"/>
+                <a:ea typeface="Amiri" pitchFamily="2" charset="-78"/>
                 <a:cs typeface="Amiri" pitchFamily="2" charset="-78"/>
               </a:rPr>
               <a:t>نَظْرَةٌ أَوْسَعُ</a:t>
@@ -19307,6 +19450,7 @@
                   <a:srgbClr val="1B3B6F"/>
                 </a:solidFill>
                 <a:latin typeface="Amiri" pitchFamily="2" charset="-78"/>
+                <a:ea typeface="Amiri" pitchFamily="2" charset="-78"/>
                 <a:cs typeface="Amiri" pitchFamily="2" charset="-78"/>
               </a:rPr>
               <a:t>مِنْ نَاحِيَةٍ … وَمِنْ نَاحِيَةٍ أُخْرَى … لٰكِنِّي أَرَى أَنَّ …</a:t>
@@ -19383,6 +19527,7 @@
                   <a:srgbClr val="1B3B6F"/>
                 </a:solidFill>
                 <a:latin typeface="Amiri" pitchFamily="2" charset="-78"/>
+                <a:ea typeface="Amiri" pitchFamily="2" charset="-78"/>
                 <a:cs typeface="Amiri" pitchFamily="2" charset="-78"/>
               </a:rPr>
               <a:t>أَيُّهُمَا أَخْطَرُ: تَغَيُّرُ المُنَاخِ أَمْ إِدْمَانُ الشَّاشَاتِ؟</a:t>
@@ -19486,6 +19631,7 @@
                   <a:srgbClr val="1B3B6F"/>
                 </a:solidFill>
                 <a:latin typeface="Amiri" pitchFamily="2" charset="-78"/>
+                <a:ea typeface="Amiri" pitchFamily="2" charset="-78"/>
                 <a:cs typeface="Amiri" pitchFamily="2" charset="-78"/>
               </a:rPr>
               <a:t>نَعَمْ، إِذَا زُرِعَتْ … فَسَتَنْخَفِضُ …</a:t>
@@ -19562,6 +19708,7 @@
                   <a:srgbClr val="1B3B6F"/>
                 </a:solidFill>
                 <a:latin typeface="Amiri" pitchFamily="2" charset="-78"/>
+                <a:ea typeface="Amiri" pitchFamily="2" charset="-78"/>
                 <a:cs typeface="Amiri" pitchFamily="2" charset="-78"/>
               </a:rPr>
               <a:t>هَلْ يُمْكِنُ أَنْ تَكُونَ المَدِينَةُ صَدِيقَةً لِلْبِيئَةِ؟</a:t>
@@ -19665,6 +19812,7 @@
                   <a:srgbClr val="1B3B6F"/>
                 </a:solidFill>
                 <a:latin typeface="Amiri" pitchFamily="2" charset="-78"/>
+                <a:ea typeface="Amiri" pitchFamily="2" charset="-78"/>
                 <a:cs typeface="Amiri" pitchFamily="2" charset="-78"/>
               </a:rPr>
               <a:t>نَعَمْ، عِنْدَمَا … فَأَدْرَكْتُ أَنَّ …</a:t>
@@ -19741,6 +19889,7 @@
                   <a:srgbClr val="1B3B6F"/>
                 </a:solidFill>
                 <a:latin typeface="Amiri" pitchFamily="2" charset="-78"/>
+                <a:ea typeface="Amiri" pitchFamily="2" charset="-78"/>
                 <a:cs typeface="Amiri" pitchFamily="2" charset="-78"/>
               </a:rPr>
               <a:t>هَلْ عِشْتَ مَوْقِفًا جَعَلَكَ تُفَكِّرُ فِي البِيئَةِ؟</a:t>
@@ -19844,6 +19993,7 @@
                   <a:srgbClr val="1B3B6F"/>
                 </a:solidFill>
                 <a:latin typeface="Amiri" pitchFamily="2" charset="-78"/>
+                <a:ea typeface="Amiri" pitchFamily="2" charset="-78"/>
                 <a:cs typeface="Amiri" pitchFamily="2" charset="-78"/>
               </a:rPr>
               <a:t>صَحِيحٌ أَنَّ … غَيْرَ أَنَّ …</a:t>
@@ -19920,6 +20070,7 @@
                   <a:srgbClr val="1B3B6F"/>
                 </a:solidFill>
                 <a:latin typeface="Amiri" pitchFamily="2" charset="-78"/>
+                <a:ea typeface="Amiri" pitchFamily="2" charset="-78"/>
                 <a:cs typeface="Amiri" pitchFamily="2" charset="-78"/>
               </a:rPr>
               <a:t>هَلِ التَّسَوُّقُ عَلَى الإِنْتَرْنِتِ يَضُرُّ بِالمُدُنِ؟</a:t>
@@ -20023,6 +20174,7 @@
                   <a:srgbClr val="1B3B6F"/>
                 </a:solidFill>
                 <a:latin typeface="Amiri" pitchFamily="2" charset="-78"/>
+                <a:ea typeface="Amiri" pitchFamily="2" charset="-78"/>
                 <a:cs typeface="Amiri" pitchFamily="2" charset="-78"/>
               </a:rPr>
               <a:t>لَوْ كُنْتُ أَسْتَطِيعُ، لَجَعَلْتُ …</a:t>
@@ -20099,6 +20251,7 @@
                   <a:srgbClr val="1B3B6F"/>
                 </a:solidFill>
                 <a:latin typeface="Amiri" pitchFamily="2" charset="-78"/>
+                <a:ea typeface="Amiri" pitchFamily="2" charset="-78"/>
                 <a:cs typeface="Amiri" pitchFamily="2" charset="-78"/>
               </a:rPr>
               <a:t>لَوْ كُنْتَ تَسْتَطِيعُ أَنْ تُغَيِّرَ شَيْئًا وَاحِدًا فِي العَالَمِ، مَاذَا تُغَيِّرُ؟</a:t>
@@ -20308,6 +20461,7 @@
                   <a:srgbClr val="D4AF37"/>
                 </a:solidFill>
                 <a:latin typeface="Amiri" pitchFamily="2" charset="-78"/>
+                <a:ea typeface="Amiri" pitchFamily="2" charset="-78"/>
                 <a:cs typeface="Amiri" pitchFamily="2" charset="-78"/>
               </a:rPr>
               <a:t>م</a:t>
@@ -20628,6 +20782,7 @@
                   <a:srgbClr val="8A6D1E"/>
                 </a:solidFill>
                 <a:latin typeface="Amiri" pitchFamily="2" charset="-78"/>
+                <a:ea typeface="Amiri" pitchFamily="2" charset="-78"/>
                 <a:cs typeface="Amiri" pitchFamily="2" charset="-78"/>
               </a:rPr>
               <a:t>آدَابُ الصَّفِّ</a:t>
@@ -22159,6 +22314,7 @@
                   <a:srgbClr val="D4AF37"/>
                 </a:solidFill>
                 <a:latin typeface="Amiri" pitchFamily="2" charset="-78"/>
+                <a:ea typeface="Amiri" pitchFamily="2" charset="-78"/>
                 <a:cs typeface="Amiri" pitchFamily="2" charset="-78"/>
               </a:rPr>
               <a:t>م</a:t>
@@ -22479,6 +22635,7 @@
                   <a:srgbClr val="8A6D1E"/>
                 </a:solidFill>
                 <a:latin typeface="Amiri" pitchFamily="2" charset="-78"/>
+                <a:ea typeface="Amiri" pitchFamily="2" charset="-78"/>
                 <a:cs typeface="Amiri" pitchFamily="2" charset="-78"/>
               </a:rPr>
               <a:t>نَمُوذَجُ الإِجَابَةِ</a:t>
@@ -22721,6 +22878,7 @@
                   <a:srgbClr val="1B3B6F"/>
                 </a:solidFill>
                 <a:latin typeface="Amiri" pitchFamily="2" charset="-78"/>
+                <a:ea typeface="Amiri" pitchFamily="2" charset="-78"/>
                 <a:cs typeface="Amiri" pitchFamily="2" charset="-78"/>
               </a:rPr>
               <a:t>الجَوُّ اليَوْمَ مُشْمِسٌ وَدَافِئٌ.</a:t>
@@ -22797,6 +22955,7 @@
                   <a:srgbClr val="1B3B6F"/>
                 </a:solidFill>
                 <a:latin typeface="Amiri" pitchFamily="2" charset="-78"/>
+                <a:ea typeface="Amiri" pitchFamily="2" charset="-78"/>
                 <a:cs typeface="Amiri" pitchFamily="2" charset="-78"/>
               </a:rPr>
               <a:t>كَيْفَ الطَّقْسُ اليَوْمَ؟</a:t>
@@ -22900,6 +23059,7 @@
                   <a:srgbClr val="1B3B6F"/>
                 </a:solidFill>
                 <a:latin typeface="Amiri" pitchFamily="2" charset="-78"/>
+                <a:ea typeface="Amiri" pitchFamily="2" charset="-78"/>
                 <a:cs typeface="Amiri" pitchFamily="2" charset="-78"/>
               </a:rPr>
               <a:t>يُوجَدُ مَرْكَزٌ رِيَاضِيٌّ، وَتُوجَدُ حَدِيقَةٌ كَبِيرَةٌ.</a:t>
@@ -22976,6 +23136,7 @@
                   <a:srgbClr val="1B3B6F"/>
                 </a:solidFill>
                 <a:latin typeface="Amiri" pitchFamily="2" charset="-78"/>
+                <a:ea typeface="Amiri" pitchFamily="2" charset="-78"/>
                 <a:cs typeface="Amiri" pitchFamily="2" charset="-78"/>
               </a:rPr>
               <a:t>مَاذَا يُوجَدُ فِي مَدِينَتِكَ؟</a:t>
@@ -23079,6 +23240,7 @@
                   <a:srgbClr val="1B3B6F"/>
                 </a:solidFill>
                 <a:latin typeface="Amiri" pitchFamily="2" charset="-78"/>
+                <a:ea typeface="Amiri" pitchFamily="2" charset="-78"/>
                 <a:cs typeface="Amiri" pitchFamily="2" charset="-78"/>
               </a:rPr>
               <a:t>أُطْفِئُ الأَضْوَاءَ، وَأُعِيدُ تَدْوِيرَ الوَرَقِ.</a:t>
@@ -23155,6 +23317,7 @@
                   <a:srgbClr val="1B3B6F"/>
                 </a:solidFill>
                 <a:latin typeface="Amiri" pitchFamily="2" charset="-78"/>
+                <a:ea typeface="Amiri" pitchFamily="2" charset="-78"/>
                 <a:cs typeface="Amiri" pitchFamily="2" charset="-78"/>
               </a:rPr>
               <a:t>كَيْفَ تَحْمِي البِيئَةَ؟</a:t>
@@ -23258,6 +23421,7 @@
                   <a:srgbClr val="1B3B6F"/>
                 </a:solidFill>
                 <a:latin typeface="Amiri" pitchFamily="2" charset="-78"/>
+                <a:ea typeface="Amiri" pitchFamily="2" charset="-78"/>
                 <a:cs typeface="Amiri" pitchFamily="2" charset="-78"/>
               </a:rPr>
               <a:t>تَطْبِيقِيَ المُفَضَّلُ تَطْبِيقُ المُوسِيقَى، لِأَنَّهُ مُمْتِعٌ.</a:t>
@@ -23334,6 +23498,7 @@
                   <a:srgbClr val="1B3B6F"/>
                 </a:solidFill>
                 <a:latin typeface="Amiri" pitchFamily="2" charset="-78"/>
+                <a:ea typeface="Amiri" pitchFamily="2" charset="-78"/>
                 <a:cs typeface="Amiri" pitchFamily="2" charset="-78"/>
               </a:rPr>
               <a:t>مَا تَطْبِيقُكَ المُفَضَّلُ؟</a:t>
@@ -23437,6 +23602,7 @@
                   <a:srgbClr val="1B3B6F"/>
                 </a:solidFill>
                 <a:latin typeface="Amiri" pitchFamily="2" charset="-78"/>
+                <a:ea typeface="Amiri" pitchFamily="2" charset="-78"/>
                 <a:cs typeface="Amiri" pitchFamily="2" charset="-78"/>
               </a:rPr>
               <a:t>فَصْلِيَ المُفَضَّلُ الخَرِيفُ، لِأَنَّ الأَلْوَانَ جَمِيلَةٌ.</a:t>
@@ -23513,6 +23679,7 @@
                   <a:srgbClr val="1B3B6F"/>
                 </a:solidFill>
                 <a:latin typeface="Amiri" pitchFamily="2" charset="-78"/>
+                <a:ea typeface="Amiri" pitchFamily="2" charset="-78"/>
                 <a:cs typeface="Amiri" pitchFamily="2" charset="-78"/>
               </a:rPr>
               <a:t>مَا فَصْلُكَ المُفَضَّلُ؟</a:t>
@@ -23722,6 +23889,7 @@
                   <a:srgbClr val="D4AF37"/>
                 </a:solidFill>
                 <a:latin typeface="Amiri" pitchFamily="2" charset="-78"/>
+                <a:ea typeface="Amiri" pitchFamily="2" charset="-78"/>
                 <a:cs typeface="Amiri" pitchFamily="2" charset="-78"/>
               </a:rPr>
               <a:t>م</a:t>
@@ -24042,6 +24210,7 @@
                   <a:srgbClr val="8A6D1E"/>
                 </a:solidFill>
                 <a:latin typeface="Amiri" pitchFamily="2" charset="-78"/>
+                <a:ea typeface="Amiri" pitchFamily="2" charset="-78"/>
                 <a:cs typeface="Amiri" pitchFamily="2" charset="-78"/>
               </a:rPr>
               <a:t>نَمُوذَجُ الإِجَابَةِ</a:t>
@@ -24284,6 +24453,7 @@
                   <a:srgbClr val="1B3B6F"/>
                 </a:solidFill>
                 <a:latin typeface="Amiri" pitchFamily="2" charset="-78"/>
+                <a:ea typeface="Amiri" pitchFamily="2" charset="-78"/>
                 <a:cs typeface="Amiri" pitchFamily="2" charset="-78"/>
               </a:rPr>
               <a:t>فِي الصَّيْفِ ذَهَبْنَا إِلَى الشَّاطِئِ، لٰكِنْ هَبَّتْ عَاصِفَةٌ قَوِيَّةٌ، لِذٰلِكَ قَضَيْنَا اليَوْمَ فِي مَتْحَفِ البَحْرِ.</a:t>
@@ -24360,6 +24530,7 @@
                   <a:srgbClr val="1B3B6F"/>
                 </a:solidFill>
                 <a:latin typeface="Amiri" pitchFamily="2" charset="-78"/>
+                <a:ea typeface="Amiri" pitchFamily="2" charset="-78"/>
                 <a:cs typeface="Amiri" pitchFamily="2" charset="-78"/>
               </a:rPr>
               <a:t>صِفْ رِحْلَةً تَأَثَّرَتْ بِالطَّقْسِ.</a:t>
@@ -24463,6 +24634,7 @@
                   <a:srgbClr val="1B3B6F"/>
                 </a:solidFill>
                 <a:latin typeface="Amiri" pitchFamily="2" charset="-78"/>
+                <a:ea typeface="Amiri" pitchFamily="2" charset="-78"/>
                 <a:cs typeface="Amiri" pitchFamily="2" charset="-78"/>
               </a:rPr>
               <a:t>كَانَ هُنَاكَ مَصْنَعٌ قَدِيمٌ، أَمَّا الآنَ فَتُوجَدُ مَكَانَهُ حَدِيقَةٌ وَمَكْتَبَةٌ رَقْمِيَّةٌ.</a:t>
@@ -24539,6 +24711,7 @@
                   <a:srgbClr val="1B3B6F"/>
                 </a:solidFill>
                 <a:latin typeface="Amiri" pitchFamily="2" charset="-78"/>
+                <a:ea typeface="Amiri" pitchFamily="2" charset="-78"/>
                 <a:cs typeface="Amiri" pitchFamily="2" charset="-78"/>
               </a:rPr>
               <a:t>كَيْفَ تَغَيَّرَتْ مَدِينَتُكَ؟</a:t>
@@ -24642,6 +24815,7 @@
                   <a:srgbClr val="1B3B6F"/>
                 </a:solidFill>
                 <a:latin typeface="Amiri" pitchFamily="2" charset="-78"/>
+                <a:ea typeface="Amiri" pitchFamily="2" charset="-78"/>
                 <a:cs typeface="Amiri" pitchFamily="2" charset="-78"/>
               </a:rPr>
               <a:t>نَعَمْ، فَمَثَلًا تُوَفِّرُ الأَلْوَاحُ الشَّمْسِيَّةُ الطَّاقَةَ، وَمَعَ ذٰلِكَ تُسَبِّبُ الأَجْهِزَةُ القَدِيمَةُ نُفَايَاتٍ كَثِيرَةً.</a:t>
@@ -24718,6 +24892,7 @@
                   <a:srgbClr val="1B3B6F"/>
                 </a:solidFill>
                 <a:latin typeface="Amiri" pitchFamily="2" charset="-78"/>
+                <a:ea typeface="Amiri" pitchFamily="2" charset="-78"/>
                 <a:cs typeface="Amiri" pitchFamily="2" charset="-78"/>
               </a:rPr>
               <a:t>هَلْ تُسَاعِدُ التِّكْنُولُوجْيَا البِيئَةَ؟</a:t>
@@ -24821,6 +24996,7 @@
                   <a:srgbClr val="1B3B6F"/>
                 </a:solidFill>
                 <a:latin typeface="Amiri" pitchFamily="2" charset="-78"/>
+                <a:ea typeface="Amiri" pitchFamily="2" charset="-78"/>
                 <a:cs typeface="Amiri" pitchFamily="2" charset="-78"/>
               </a:rPr>
               <a:t>أُفَضِّلُ المَدِينَةَ، لِأَنَّ الخِدْمَاتِ أَكْثَرُ؛ بِالإِضَافَةِ إِلَى ذٰلِكَ، المُوَاصَلَاتُ أَسْرَعُ.</a:t>
@@ -24900,6 +25076,7 @@
                   <a:srgbClr val="1B3B6F"/>
                 </a:solidFill>
                 <a:latin typeface="Amiri" pitchFamily="2" charset="-78"/>
+                <a:ea typeface="Amiri" pitchFamily="2" charset="-78"/>
                 <a:cs typeface="Amiri" pitchFamily="2" charset="-78"/>
               </a:rPr>
               <a:t>أَيْنَ تُفَضِّلُ أَنْ تَسْكُنَ: فِي المَدِينَةِ أَمْ فِي الرِّيفِ؟</a:t>
@@ -25003,6 +25180,7 @@
                   <a:srgbClr val="1B3B6F"/>
                 </a:solidFill>
                 <a:latin typeface="Amiri" pitchFamily="2" charset="-78"/>
+                <a:ea typeface="Amiri" pitchFamily="2" charset="-78"/>
                 <a:cs typeface="Amiri" pitchFamily="2" charset="-78"/>
               </a:rPr>
               <a:t>سَأُسَافِرُ إِلَى الأُرْدُنِّ، وَسَأَحْجِزُ رِحْلَةً إِلَى البَتْرَاءِ عَلَى الإِنْتَرْنِتِ قَبْلَ السَّفَرِ.</a:t>
@@ -25079,6 +25257,7 @@
                   <a:srgbClr val="1B3B6F"/>
                 </a:solidFill>
                 <a:latin typeface="Amiri" pitchFamily="2" charset="-78"/>
+                <a:ea typeface="Amiri" pitchFamily="2" charset="-78"/>
                 <a:cs typeface="Amiri" pitchFamily="2" charset="-78"/>
               </a:rPr>
               <a:t>مَاذَا سَتَفْعَلُ فِي العُطْلَةِ القَادِمَةِ؟</a:t>
@@ -25288,6 +25467,7 @@
                   <a:srgbClr val="D4AF37"/>
                 </a:solidFill>
                 <a:latin typeface="Amiri" pitchFamily="2" charset="-78"/>
+                <a:ea typeface="Amiri" pitchFamily="2" charset="-78"/>
                 <a:cs typeface="Amiri" pitchFamily="2" charset="-78"/>
               </a:rPr>
               <a:t>م</a:t>
@@ -25608,6 +25788,7 @@
                   <a:srgbClr val="8A6D1E"/>
                 </a:solidFill>
                 <a:latin typeface="Amiri" pitchFamily="2" charset="-78"/>
+                <a:ea typeface="Amiri" pitchFamily="2" charset="-78"/>
                 <a:cs typeface="Amiri" pitchFamily="2" charset="-78"/>
               </a:rPr>
               <a:t>نَمُوذَجُ الإِجَابَةِ</a:t>
@@ -25850,6 +26031,7 @@
                   <a:srgbClr val="1B3B6F"/>
                 </a:solidFill>
                 <a:latin typeface="Amiri" pitchFamily="2" charset="-78"/>
+                <a:ea typeface="Amiri" pitchFamily="2" charset="-78"/>
                 <a:cs typeface="Amiri" pitchFamily="2" charset="-78"/>
               </a:rPr>
               <a:t>مِنْ نَاحِيَةٍ، يُؤَثِّرُ الإِدْمَانُ فِي صِحَّتِنَا، وَمِنْ نَاحِيَةٍ أُخْرَى، يُهَدِّدُ تَغَيُّرُ المُنَاخِ الكَوْكَبَ كُلَّهُ؛ لِذٰلِكَ أَرَى أَنَّهُ أَخْطَرُ.</a:t>
@@ -25929,6 +26111,7 @@
                   <a:srgbClr val="1B3B6F"/>
                 </a:solidFill>
                 <a:latin typeface="Amiri" pitchFamily="2" charset="-78"/>
+                <a:ea typeface="Amiri" pitchFamily="2" charset="-78"/>
                 <a:cs typeface="Amiri" pitchFamily="2" charset="-78"/>
               </a:rPr>
               <a:t>أَيُّهُمَا أَخْطَرُ: تَغَيُّرُ المُنَاخِ أَمْ إِدْمَانُ الشَّاشَاتِ؟</a:t>
@@ -26032,6 +26215,7 @@
                   <a:srgbClr val="1B3B6F"/>
                 </a:solidFill>
                 <a:latin typeface="Amiri" pitchFamily="2" charset="-78"/>
+                <a:ea typeface="Amiri" pitchFamily="2" charset="-78"/>
                 <a:cs typeface="Amiri" pitchFamily="2" charset="-78"/>
               </a:rPr>
               <a:t>نَعَمْ، إِذَا زُرِعَتِ الأَشْجَارُ عَلَى الأَسْطُحِ، وَأَصْبَحَتِ المُوَاصَلَاتُ كَهْرَبَائِيَّةً، فَسَتَنْخَفِضُ الحَرَارَةُ وَالتَّلَوُّثُ مَعًا.</a:t>
@@ -26108,6 +26292,7 @@
                   <a:srgbClr val="1B3B6F"/>
                 </a:solidFill>
                 <a:latin typeface="Amiri" pitchFamily="2" charset="-78"/>
+                <a:ea typeface="Amiri" pitchFamily="2" charset="-78"/>
                 <a:cs typeface="Amiri" pitchFamily="2" charset="-78"/>
               </a:rPr>
               <a:t>هَلْ يُمْكِنُ أَنْ تَكُونَ المَدِينَةُ صَدِيقَةً لِلْبِيئَةِ؟</a:t>
@@ -26211,6 +26396,7 @@
                   <a:srgbClr val="1B3B6F"/>
                 </a:solidFill>
                 <a:latin typeface="Amiri" pitchFamily="2" charset="-78"/>
+                <a:ea typeface="Amiri" pitchFamily="2" charset="-78"/>
                 <a:cs typeface="Amiri" pitchFamily="2" charset="-78"/>
               </a:rPr>
               <a:t>نَعَمْ، عِنْدَمَا فَاضَ النَّهْرُ فِي مَدِينَتِنَا وَأُغْلِقَتِ المَدَارِسُ، فَأَدْرَكْتُ أَنَّ تَغَيُّرَ المُنَاخِ لَيْسَ بَعِيدًا عَنَّا.</a:t>
@@ -26287,6 +26473,7 @@
                   <a:srgbClr val="1B3B6F"/>
                 </a:solidFill>
                 <a:latin typeface="Amiri" pitchFamily="2" charset="-78"/>
+                <a:ea typeface="Amiri" pitchFamily="2" charset="-78"/>
                 <a:cs typeface="Amiri" pitchFamily="2" charset="-78"/>
               </a:rPr>
               <a:t>هَلْ عِشْتَ مَوْقِفًا جَعَلَكَ تُفَكِّرُ فِي البِيئَةِ؟</a:t>
@@ -26496,6 +26683,7 @@
                   <a:srgbClr val="D4AF37"/>
                 </a:solidFill>
                 <a:latin typeface="Amiri" pitchFamily="2" charset="-78"/>
+                <a:ea typeface="Amiri" pitchFamily="2" charset="-78"/>
                 <a:cs typeface="Amiri" pitchFamily="2" charset="-78"/>
               </a:rPr>
               <a:t>م</a:t>
@@ -26816,6 +27004,7 @@
                   <a:srgbClr val="8A6D1E"/>
                 </a:solidFill>
                 <a:latin typeface="Amiri" pitchFamily="2" charset="-78"/>
+                <a:ea typeface="Amiri" pitchFamily="2" charset="-78"/>
                 <a:cs typeface="Amiri" pitchFamily="2" charset="-78"/>
               </a:rPr>
               <a:t>نَمُوذَجُ الإِجَابَةِ</a:t>
@@ -27058,6 +27247,7 @@
                   <a:srgbClr val="1B3B6F"/>
                 </a:solidFill>
                 <a:latin typeface="Amiri" pitchFamily="2" charset="-78"/>
+                <a:ea typeface="Amiri" pitchFamily="2" charset="-78"/>
                 <a:cs typeface="Amiri" pitchFamily="2" charset="-78"/>
               </a:rPr>
               <a:t>صَحِيحٌ أَنَّهُ مُرِيحٌ، غَيْرَ أَنَّ مَحَلَّاتٍ كَثِيرَةً أُغْلِقَتْ فِي شَارِعِنَا، مِمَّا جَعَلَ وَسَطَ المَدِينَةِ حَزِينًا وَفَارِغًا.</a:t>
@@ -27134,6 +27324,7 @@
                   <a:srgbClr val="1B3B6F"/>
                 </a:solidFill>
                 <a:latin typeface="Amiri" pitchFamily="2" charset="-78"/>
+                <a:ea typeface="Amiri" pitchFamily="2" charset="-78"/>
                 <a:cs typeface="Amiri" pitchFamily="2" charset="-78"/>
               </a:rPr>
               <a:t>هَلِ التَّسَوُّقُ عَلَى الإِنْتَرْنِتِ يَضُرُّ بِالمُدُنِ؟</a:t>
@@ -27237,6 +27428,7 @@
                   <a:srgbClr val="1B3B6F"/>
                 </a:solidFill>
                 <a:latin typeface="Amiri" pitchFamily="2" charset="-78"/>
+                <a:ea typeface="Amiri" pitchFamily="2" charset="-78"/>
                 <a:cs typeface="Amiri" pitchFamily="2" charset="-78"/>
               </a:rPr>
               <a:t>لَوْ كُنْتُ أَسْتَطِيعُ، لَجَعَلْتُ الطَّاقَةَ النَّظِيفَةَ مَجَّانِيَّةً لِلْجَمِيعِ، لِأَنَّ ذٰلِكَ سَيَحُلُّ مَشَاكِلَ كَثِيرَةً فِي وَقْتٍ وَاحِدٍ.</a:t>
@@ -27316,6 +27508,7 @@
                   <a:srgbClr val="1B3B6F"/>
                 </a:solidFill>
                 <a:latin typeface="Amiri" pitchFamily="2" charset="-78"/>
+                <a:ea typeface="Amiri" pitchFamily="2" charset="-78"/>
                 <a:cs typeface="Amiri" pitchFamily="2" charset="-78"/>
               </a:rPr>
               <a:t>لَوْ كُنْتَ تَسْتَطِيعُ أَنْ تُغَيِّرَ شَيْئًا وَاحِدًا فِي العَالَمِ، مَاذَا تُغَيِّرُ؟</a:t>
@@ -27525,6 +27718,7 @@
                   <a:srgbClr val="D4AF37"/>
                 </a:solidFill>
                 <a:latin typeface="Amiri" pitchFamily="2" charset="-78"/>
+                <a:ea typeface="Amiri" pitchFamily="2" charset="-78"/>
                 <a:cs typeface="Amiri" pitchFamily="2" charset="-78"/>
               </a:rPr>
               <a:t>م</a:t>
@@ -27845,6 +28039,7 @@
                   <a:srgbClr val="8A6D1E"/>
                 </a:solidFill>
                 <a:latin typeface="Amiri" pitchFamily="2" charset="-78"/>
+                <a:ea typeface="Amiri" pitchFamily="2" charset="-78"/>
                 <a:cs typeface="Amiri" pitchFamily="2" charset="-78"/>
               </a:rPr>
               <a:t>قَيِّمْ عَمَلَكَ</a:t>
@@ -29089,6 +29284,7 @@
                   <a:srgbClr val="FFFFFF"/>
                 </a:solidFill>
                 <a:latin typeface="Amiri" pitchFamily="2" charset="-78"/>
+                <a:ea typeface="Amiri" pitchFamily="2" charset="-78"/>
                 <a:cs typeface="Amiri" pitchFamily="2" charset="-78"/>
               </a:rPr>
               <a:t>أَحْسَنْتُمْ! إِلَى اللِّقَاءِ</a:t>
@@ -29241,6 +29437,7 @@
                   <a:srgbClr val="D4AF37"/>
                 </a:solidFill>
                 <a:latin typeface="Amiri" pitchFamily="2" charset="-78"/>
+                <a:ea typeface="Amiri" pitchFamily="2" charset="-78"/>
                 <a:cs typeface="Amiri" pitchFamily="2" charset="-78"/>
               </a:rPr>
               <a:t>وَرْشَةُ الكِتَابَةِ</a:t>
@@ -29374,6 +29571,7 @@
                   <a:srgbClr val="D4AF37"/>
                 </a:solidFill>
                 <a:latin typeface="Amiri" pitchFamily="2" charset="-78"/>
+                <a:ea typeface="Amiri" pitchFamily="2" charset="-78"/>
                 <a:cs typeface="Amiri" pitchFamily="2" charset="-78"/>
               </a:rPr>
               <a:t>م</a:t>
@@ -29694,6 +29892,7 @@
                   <a:srgbClr val="8A6D1E"/>
                 </a:solidFill>
                 <a:latin typeface="Amiri" pitchFamily="2" charset="-78"/>
+                <a:ea typeface="Amiri" pitchFamily="2" charset="-78"/>
                 <a:cs typeface="Amiri" pitchFamily="2" charset="-78"/>
               </a:rPr>
               <a:t>خَرِيطَةُ الوَرْشَةِ</a:t>
@@ -30008,6 +30207,7 @@
                   <a:srgbClr val="1B3B6F"/>
                 </a:solidFill>
                 <a:latin typeface="Amiri" pitchFamily="2" charset="-78"/>
+                <a:ea typeface="Amiri" pitchFamily="2" charset="-78"/>
                 <a:cs typeface="Amiri" pitchFamily="2" charset="-78"/>
               </a:rPr>
               <a:t>كَيْفَ</a:t>
@@ -30284,6 +30484,7 @@
                   <a:srgbClr val="1E6B52"/>
                 </a:solidFill>
                 <a:latin typeface="Amiri" pitchFamily="2" charset="-78"/>
+                <a:ea typeface="Amiri" pitchFamily="2" charset="-78"/>
                 <a:cs typeface="Amiri" pitchFamily="2" charset="-78"/>
               </a:rPr>
               <a:t>تَمْثِيلُ الدَّوْرِ</a:t>
@@ -30560,6 +30761,7 @@
                   <a:srgbClr val="8A6D1E"/>
                 </a:solidFill>
                 <a:latin typeface="Amiri" pitchFamily="2" charset="-78"/>
+                <a:ea typeface="Amiri" pitchFamily="2" charset="-78"/>
                 <a:cs typeface="Amiri" pitchFamily="2" charset="-78"/>
               </a:rPr>
               <a:t>النَّمُوذَجُ</a:t>
@@ -30836,6 +31038,7 @@
                   <a:srgbClr val="1E6B52"/>
                 </a:solidFill>
                 <a:latin typeface="Amiri" pitchFamily="2" charset="-78"/>
+                <a:ea typeface="Amiri" pitchFamily="2" charset="-78"/>
                 <a:cs typeface="Amiri" pitchFamily="2" charset="-78"/>
               </a:rPr>
               <a:t>المُحَادَثَةُ</a:t>
@@ -31112,6 +31315,7 @@
                   <a:srgbClr val="8A6D1E"/>
                 </a:solidFill>
                 <a:latin typeface="Amiri" pitchFamily="2" charset="-78"/>
+                <a:ea typeface="Amiri" pitchFamily="2" charset="-78"/>
                 <a:cs typeface="Amiri" pitchFamily="2" charset="-78"/>
               </a:rPr>
               <a:t>قَيِّمْ</a:t>
@@ -31355,6 +31559,7 @@
                   <a:srgbClr val="D4AF37"/>
                 </a:solidFill>
                 <a:latin typeface="Amiri" pitchFamily="2" charset="-78"/>
+                <a:ea typeface="Amiri" pitchFamily="2" charset="-78"/>
                 <a:cs typeface="Amiri" pitchFamily="2" charset="-78"/>
               </a:rPr>
               <a:t>م</a:t>
@@ -31675,6 +31880,7 @@
                   <a:srgbClr val="8A6D1E"/>
                 </a:solidFill>
                 <a:latin typeface="Amiri" pitchFamily="2" charset="-78"/>
+                <a:ea typeface="Amiri" pitchFamily="2" charset="-78"/>
                 <a:cs typeface="Amiri" pitchFamily="2" charset="-78"/>
               </a:rPr>
               <a:t>امْتِحَانُ التَّحَدُّثِ</a:t>
@@ -32299,6 +32505,7 @@
                   <a:srgbClr val="1B3B6F"/>
                 </a:solidFill>
                 <a:latin typeface="Amiri" pitchFamily="2" charset="-78"/>
+                <a:ea typeface="Amiri" pitchFamily="2" charset="-78"/>
                 <a:cs typeface="Amiri" pitchFamily="2" charset="-78"/>
               </a:rPr>
               <a:t>عَفْوًا، هَلْ يُمْكِنُ أَنْ تُعِيدَ السُّؤَالَ؟</a:t>
@@ -32398,6 +32605,7 @@
                   <a:srgbClr val="1B3B6F"/>
                 </a:solidFill>
                 <a:latin typeface="Amiri" pitchFamily="2" charset="-78"/>
+                <a:ea typeface="Amiri" pitchFamily="2" charset="-78"/>
                 <a:cs typeface="Amiri" pitchFamily="2" charset="-78"/>
               </a:rPr>
               <a:t>لَحْظَةً، دَعْنِي أُفَكِّرُ …</a:t>
@@ -32497,6 +32705,7 @@
                   <a:srgbClr val="1B3B6F"/>
                 </a:solidFill>
                 <a:latin typeface="Amiri" pitchFamily="2" charset="-78"/>
+                <a:ea typeface="Amiri" pitchFamily="2" charset="-78"/>
                 <a:cs typeface="Amiri" pitchFamily="2" charset="-78"/>
               </a:rPr>
               <a:t>أَقْصِدُ …</a:t>
@@ -32668,6 +32877,7 @@
                   <a:srgbClr val="D4AF37"/>
                 </a:solidFill>
                 <a:latin typeface="Amiri" pitchFamily="2" charset="-78"/>
+                <a:ea typeface="Amiri" pitchFamily="2" charset="-78"/>
                 <a:cs typeface="Amiri" pitchFamily="2" charset="-78"/>
               </a:rPr>
               <a:t>م</a:t>
@@ -32988,6 +33198,7 @@
                   <a:srgbClr val="8A6D1E"/>
                 </a:solidFill>
                 <a:latin typeface="Amiri" pitchFamily="2" charset="-78"/>
+                <a:ea typeface="Amiri" pitchFamily="2" charset="-78"/>
                 <a:cs typeface="Amiri" pitchFamily="2" charset="-78"/>
               </a:rPr>
               <a:t>أَدَوَاتُ الرَّبْطِ</a:t>
@@ -33291,6 +33502,7 @@
                   <a:srgbClr val="1B3B6F"/>
                 </a:solidFill>
                 <a:latin typeface="Amiri" pitchFamily="2" charset="-78"/>
+                <a:ea typeface="Amiri" pitchFamily="2" charset="-78"/>
                 <a:cs typeface="Amiri" pitchFamily="2" charset="-78"/>
               </a:rPr>
               <a:t>أَوَّلًا · ثَانِيًا</a:t>
@@ -33448,6 +33660,7 @@
                   <a:srgbClr val="1B3B6F"/>
                 </a:solidFill>
                 <a:latin typeface="Amiri" pitchFamily="2" charset="-78"/>
+                <a:ea typeface="Amiri" pitchFamily="2" charset="-78"/>
                 <a:cs typeface="Amiri" pitchFamily="2" charset="-78"/>
               </a:rPr>
               <a:t>ثُمَّ · بَعْدَ ذٰلِكَ</a:t>
@@ -33551,6 +33764,7 @@
                   <a:srgbClr val="1B3B6F"/>
                 </a:solidFill>
                 <a:latin typeface="Amiri" pitchFamily="2" charset="-78"/>
+                <a:ea typeface="Amiri" pitchFamily="2" charset="-78"/>
                 <a:cs typeface="Amiri" pitchFamily="2" charset="-78"/>
               </a:rPr>
               <a:t>أَخِيرًا</a:t>
@@ -33816,6 +34030,7 @@
                   <a:srgbClr val="1B3B6F"/>
                 </a:solidFill>
                 <a:latin typeface="Amiri" pitchFamily="2" charset="-78"/>
+                <a:ea typeface="Amiri" pitchFamily="2" charset="-78"/>
                 <a:cs typeface="Amiri" pitchFamily="2" charset="-78"/>
               </a:rPr>
               <a:t>بِالإِضَافَةِ إِلَى ذٰلِكَ</a:t>
@@ -33973,6 +34188,7 @@
                   <a:srgbClr val="1B3B6F"/>
                 </a:solidFill>
                 <a:latin typeface="Amiri" pitchFamily="2" charset="-78"/>
+                <a:ea typeface="Amiri" pitchFamily="2" charset="-78"/>
                 <a:cs typeface="Amiri" pitchFamily="2" charset="-78"/>
               </a:rPr>
               <a:t>فَضْلًا عَنْ ذٰلِكَ</a:t>
@@ -34076,6 +34292,7 @@
                   <a:srgbClr val="1B3B6F"/>
                 </a:solidFill>
                 <a:latin typeface="Amiri" pitchFamily="2" charset="-78"/>
+                <a:ea typeface="Amiri" pitchFamily="2" charset="-78"/>
                 <a:cs typeface="Amiri" pitchFamily="2" charset="-78"/>
               </a:rPr>
               <a:t>كَمَا أَنَّ …</a:t>
@@ -34341,6 +34558,7 @@
                   <a:srgbClr val="1B3B6F"/>
                 </a:solidFill>
                 <a:latin typeface="Amiri" pitchFamily="2" charset="-78"/>
+                <a:ea typeface="Amiri" pitchFamily="2" charset="-78"/>
                 <a:cs typeface="Amiri" pitchFamily="2" charset="-78"/>
               </a:rPr>
               <a:t>مَعَ ذٰلِكَ</a:t>
@@ -34498,6 +34716,7 @@
                   <a:srgbClr val="1B3B6F"/>
                 </a:solidFill>
                 <a:latin typeface="Amiri" pitchFamily="2" charset="-78"/>
+                <a:ea typeface="Amiri" pitchFamily="2" charset="-78"/>
                 <a:cs typeface="Amiri" pitchFamily="2" charset="-78"/>
               </a:rPr>
               <a:t>مَعَ أَنَّ …</a:t>
@@ -34601,6 +34820,7 @@
                   <a:srgbClr val="1B3B6F"/>
                 </a:solidFill>
                 <a:latin typeface="Amiri" pitchFamily="2" charset="-78"/>
+                <a:ea typeface="Amiri" pitchFamily="2" charset="-78"/>
                 <a:cs typeface="Amiri" pitchFamily="2" charset="-78"/>
               </a:rPr>
               <a:t>غَيْرَ أَنَّ …</a:t>
@@ -34866,6 +35086,7 @@
                   <a:srgbClr val="1B3B6F"/>
                 </a:solidFill>
                 <a:latin typeface="Amiri" pitchFamily="2" charset="-78"/>
+                <a:ea typeface="Amiri" pitchFamily="2" charset="-78"/>
                 <a:cs typeface="Amiri" pitchFamily="2" charset="-78"/>
               </a:rPr>
               <a:t>لِذٰلِكَ</a:t>
@@ -35023,6 +35244,7 @@
                   <a:srgbClr val="1B3B6F"/>
                 </a:solidFill>
                 <a:latin typeface="Amiri" pitchFamily="2" charset="-78"/>
+                <a:ea typeface="Amiri" pitchFamily="2" charset="-78"/>
                 <a:cs typeface="Amiri" pitchFamily="2" charset="-78"/>
               </a:rPr>
               <a:t>مِمَّا يُؤَدِّي إِلَى</a:t>
@@ -35126,6 +35348,7 @@
                   <a:srgbClr val="1B3B6F"/>
                 </a:solidFill>
                 <a:latin typeface="Amiri" pitchFamily="2" charset="-78"/>
+                <a:ea typeface="Amiri" pitchFamily="2" charset="-78"/>
                 <a:cs typeface="Amiri" pitchFamily="2" charset="-78"/>
               </a:rPr>
               <a:t>فَذَهَبْنَا</a:t>
@@ -35391,6 +35614,7 @@
                   <a:srgbClr val="1B3B6F"/>
                 </a:solidFill>
                 <a:latin typeface="Amiri" pitchFamily="2" charset="-78"/>
+                <a:ea typeface="Amiri" pitchFamily="2" charset="-78"/>
                 <a:cs typeface="Amiri" pitchFamily="2" charset="-78"/>
               </a:rPr>
               <a:t>مِنْ نَاحِيَةٍ …</a:t>
@@ -35548,6 +35772,7 @@
                   <a:srgbClr val="1B3B6F"/>
                 </a:solidFill>
                 <a:latin typeface="Amiri" pitchFamily="2" charset="-78"/>
+                <a:ea typeface="Amiri" pitchFamily="2" charset="-78"/>
                 <a:cs typeface="Amiri" pitchFamily="2" charset="-78"/>
               </a:rPr>
               <a:t>وَمِنْ نَاحِيَةٍ أُخْرَى …</a:t>
@@ -35813,6 +36038,7 @@
                   <a:srgbClr val="1B3B6F"/>
                 </a:solidFill>
                 <a:latin typeface="Amiri" pitchFamily="2" charset="-78"/>
+                <a:ea typeface="Amiri" pitchFamily="2" charset="-78"/>
                 <a:cs typeface="Amiri" pitchFamily="2" charset="-78"/>
               </a:rPr>
               <a:t>فِي رَأْيِي</a:t>
@@ -35970,6 +36196,7 @@
                   <a:srgbClr val="1B3B6F"/>
                 </a:solidFill>
                 <a:latin typeface="Amiri" pitchFamily="2" charset="-78"/>
+                <a:ea typeface="Amiri" pitchFamily="2" charset="-78"/>
                 <a:cs typeface="Amiri" pitchFamily="2" charset="-78"/>
               </a:rPr>
               <a:t>أَرَى أَنَّ</a:t>
@@ -36073,6 +36300,7 @@
                   <a:srgbClr val="1B3B6F"/>
                 </a:solidFill>
                 <a:latin typeface="Amiri" pitchFamily="2" charset="-78"/>
+                <a:ea typeface="Amiri" pitchFamily="2" charset="-78"/>
                 <a:cs typeface="Amiri" pitchFamily="2" charset="-78"/>
               </a:rPr>
               <a:t>أَعْتَقِدُ أَنَّ</a:t>
@@ -36206,6 +36434,7 @@
                   <a:srgbClr val="D4AF37"/>
                 </a:solidFill>
                 <a:latin typeface="Amiri" pitchFamily="2" charset="-78"/>
+                <a:ea typeface="Amiri" pitchFamily="2" charset="-78"/>
                 <a:cs typeface="Amiri" pitchFamily="2" charset="-78"/>
               </a:rPr>
               <a:t>م</a:t>
@@ -36526,6 +36755,7 @@
                   <a:srgbClr val="8A6D1E"/>
                 </a:solidFill>
                 <a:latin typeface="Amiri" pitchFamily="2" charset="-78"/>
+                <a:ea typeface="Amiri" pitchFamily="2" charset="-78"/>
                 <a:cs typeface="Amiri" pitchFamily="2" charset="-78"/>
               </a:rPr>
               <a:t>مَوْضُوعَاتُ الوَحْدَةِ</a:t>
@@ -36829,6 +37059,7 @@
                   <a:srgbClr val="1B3B6F"/>
                 </a:solidFill>
                 <a:latin typeface="Amiri" pitchFamily="2" charset="-78"/>
+                <a:ea typeface="Amiri" pitchFamily="2" charset="-78"/>
                 <a:cs typeface="Amiri" pitchFamily="2" charset="-78"/>
               </a:rPr>
               <a:t>الطَّقْسُ · المُنَاخُ</a:t>
@@ -36986,6 +37217,7 @@
                   <a:srgbClr val="1B3B6F"/>
                 </a:solidFill>
                 <a:latin typeface="Amiri" pitchFamily="2" charset="-78"/>
+                <a:ea typeface="Amiri" pitchFamily="2" charset="-78"/>
                 <a:cs typeface="Amiri" pitchFamily="2" charset="-78"/>
               </a:rPr>
               <a:t>أَبْرَدُ · أَحَرُّ</a:t>
@@ -37089,6 +37321,7 @@
                   <a:srgbClr val="1B3B6F"/>
                 </a:solidFill>
                 <a:latin typeface="Amiri" pitchFamily="2" charset="-78"/>
+                <a:ea typeface="Amiri" pitchFamily="2" charset="-78"/>
                 <a:cs typeface="Amiri" pitchFamily="2" charset="-78"/>
               </a:rPr>
               <a:t>تَسْقُطُ الأَمْطَارُ</a:t>
@@ -37354,6 +37587,7 @@
                   <a:srgbClr val="1B3B6F"/>
                 </a:solidFill>
                 <a:latin typeface="Amiri" pitchFamily="2" charset="-78"/>
+                <a:ea typeface="Amiri" pitchFamily="2" charset="-78"/>
                 <a:cs typeface="Amiri" pitchFamily="2" charset="-78"/>
               </a:rPr>
               <a:t>البِيئَةُ</a:t>
@@ -37511,6 +37745,7 @@
                   <a:srgbClr val="1B3B6F"/>
                 </a:solidFill>
                 <a:latin typeface="Amiri" pitchFamily="2" charset="-78"/>
+                <a:ea typeface="Amiri" pitchFamily="2" charset="-78"/>
                 <a:cs typeface="Amiri" pitchFamily="2" charset="-78"/>
               </a:rPr>
               <a:t>إِعَادَةُ التَّدْوِيرِ</a:t>
@@ -37614,6 +37849,7 @@
                   <a:srgbClr val="1B3B6F"/>
                 </a:solidFill>
                 <a:latin typeface="Amiri" pitchFamily="2" charset="-78"/>
+                <a:ea typeface="Amiri" pitchFamily="2" charset="-78"/>
                 <a:cs typeface="Amiri" pitchFamily="2" charset="-78"/>
               </a:rPr>
               <a:t>التَّلَوُّثُ</a:t>
@@ -37879,6 +38115,7 @@
                   <a:srgbClr val="1B3B6F"/>
                 </a:solidFill>
                 <a:latin typeface="Amiri" pitchFamily="2" charset="-78"/>
+                <a:ea typeface="Amiri" pitchFamily="2" charset="-78"/>
                 <a:cs typeface="Amiri" pitchFamily="2" charset="-78"/>
               </a:rPr>
               <a:t>التِّكْنُولُوجْيَا</a:t>
@@ -38036,6 +38273,7 @@
                   <a:srgbClr val="1B3B6F"/>
                 </a:solidFill>
                 <a:latin typeface="Amiri" pitchFamily="2" charset="-78"/>
+                <a:ea typeface="Amiri" pitchFamily="2" charset="-78"/>
                 <a:cs typeface="Amiri" pitchFamily="2" charset="-78"/>
               </a:rPr>
               <a:t>تَطْبِيقَاتٌ</a:t>
@@ -38139,6 +38377,7 @@
                   <a:srgbClr val="1B3B6F"/>
                 </a:solidFill>
                 <a:latin typeface="Amiri" pitchFamily="2" charset="-78"/>
+                <a:ea typeface="Amiri" pitchFamily="2" charset="-78"/>
                 <a:cs typeface="Amiri" pitchFamily="2" charset="-78"/>
               </a:rPr>
               <a:t>أَتَوَاصَلُ مَعَ</a:t>
@@ -38404,6 +38643,7 @@
                   <a:srgbClr val="1B3B6F"/>
                 </a:solidFill>
                 <a:latin typeface="Amiri" pitchFamily="2" charset="-78"/>
+                <a:ea typeface="Amiri" pitchFamily="2" charset="-78"/>
                 <a:cs typeface="Amiri" pitchFamily="2" charset="-78"/>
               </a:rPr>
               <a:t>المَدِينَةُ · الرِّيفُ</a:t>
@@ -38561,6 +38801,7 @@
                   <a:srgbClr val="1B3B6F"/>
                 </a:solidFill>
                 <a:latin typeface="Amiri" pitchFamily="2" charset="-78"/>
+                <a:ea typeface="Amiri" pitchFamily="2" charset="-78"/>
                 <a:cs typeface="Amiri" pitchFamily="2" charset="-78"/>
               </a:rPr>
               <a:t>خِدْمَاتٌ</a:t>
@@ -38664,6 +38905,7 @@
                   <a:srgbClr val="1B3B6F"/>
                 </a:solidFill>
                 <a:latin typeface="Amiri" pitchFamily="2" charset="-78"/>
+                <a:ea typeface="Amiri" pitchFamily="2" charset="-78"/>
                 <a:cs typeface="Amiri" pitchFamily="2" charset="-78"/>
               </a:rPr>
               <a:t>يُوجَدُ · تُوجَدُ</a:t>
@@ -38929,6 +39171,7 @@
                   <a:srgbClr val="1B3B6F"/>
                 </a:solidFill>
                 <a:latin typeface="Amiri" pitchFamily="2" charset="-78"/>
+                <a:ea typeface="Amiri" pitchFamily="2" charset="-78"/>
                 <a:cs typeface="Amiri" pitchFamily="2" charset="-78"/>
               </a:rPr>
               <a:t>كُنْتُ</a:t>
@@ -39099,6 +39342,7 @@
                   <a:srgbClr val="1B3B6F"/>
                 </a:solidFill>
                 <a:latin typeface="Amiri" pitchFamily="2" charset="-78"/>
+                <a:ea typeface="Amiri" pitchFamily="2" charset="-78"/>
                 <a:cs typeface="Amiri" pitchFamily="2" charset="-78"/>
               </a:rPr>
               <a:t>كَانَتْ تَلْعَبُ</a:t>
@@ -39202,6 +39446,7 @@
                   <a:srgbClr val="1B3B6F"/>
                 </a:solidFill>
                 <a:latin typeface="Amiri" pitchFamily="2" charset="-78"/>
+                <a:ea typeface="Amiri" pitchFamily="2" charset="-78"/>
                 <a:cs typeface="Amiri" pitchFamily="2" charset="-78"/>
               </a:rPr>
               <a:t>كُنْتُ أَلْعَبُ</a:t>
@@ -39467,6 +39712,7 @@
                   <a:srgbClr val="1B3B6F"/>
                 </a:solidFill>
                 <a:latin typeface="Amiri" pitchFamily="2" charset="-78"/>
+                <a:ea typeface="Amiri" pitchFamily="2" charset="-78"/>
                 <a:cs typeface="Amiri" pitchFamily="2" charset="-78"/>
               </a:rPr>
               <a:t>لَوْ كُنْتُ … لَاخْتَرْتُ …</a:t>
@@ -39624,6 +39870,7 @@
                   <a:srgbClr val="1B3B6F"/>
                 </a:solidFill>
                 <a:latin typeface="Amiri" pitchFamily="2" charset="-78"/>
+                <a:ea typeface="Amiri" pitchFamily="2" charset="-78"/>
                 <a:cs typeface="Amiri" pitchFamily="2" charset="-78"/>
               </a:rPr>
               <a:t>لَاخْتَرْتُ</a:t>
@@ -39727,6 +39974,7 @@
                   <a:srgbClr val="1B3B6F"/>
                 </a:solidFill>
                 <a:latin typeface="Amiri" pitchFamily="2" charset="-78"/>
+                <a:ea typeface="Amiri" pitchFamily="2" charset="-78"/>
                 <a:cs typeface="Amiri" pitchFamily="2" charset="-78"/>
               </a:rPr>
               <a:t>لَوْ كُنْتُ …</a:t>
@@ -39860,6 +40108,7 @@
                   <a:srgbClr val="D4AF37"/>
                 </a:solidFill>
                 <a:latin typeface="Amiri" pitchFamily="2" charset="-78"/>
+                <a:ea typeface="Amiri" pitchFamily="2" charset="-78"/>
                 <a:cs typeface="Amiri" pitchFamily="2" charset="-78"/>
               </a:rPr>
               <a:t>م</a:t>
@@ -40180,6 +40429,7 @@
                   <a:srgbClr val="8A6D1E"/>
                 </a:solidFill>
                 <a:latin typeface="Amiri" pitchFamily="2" charset="-78"/>
+                <a:ea typeface="Amiri" pitchFamily="2" charset="-78"/>
                 <a:cs typeface="Amiri" pitchFamily="2" charset="-78"/>
               </a:rPr>
               <a:t>فِي الغُرَفِ</a:t>
@@ -41356,6 +41606,7 @@
                   <a:srgbClr val="1B3B6F"/>
                 </a:solidFill>
                 <a:latin typeface="Amiri" pitchFamily="2" charset="-78"/>
+                <a:ea typeface="Amiri" pitchFamily="2" charset="-78"/>
                 <a:cs typeface="Amiri" pitchFamily="2" charset="-78"/>
               </a:rPr>
               <a:t>دَوْرُكَ!</a:t>
@@ -41432,6 +41683,7 @@
                   <a:srgbClr val="1B3B6F"/>
                 </a:solidFill>
                 <a:latin typeface="Amiri" pitchFamily="2" charset="-78"/>
+                <a:ea typeface="Amiri" pitchFamily="2" charset="-78"/>
                 <a:cs typeface="Amiri" pitchFamily="2" charset="-78"/>
               </a:rPr>
               <a:t>أَحْسَنْتَ! / أَحْسَنْتِ!</a:t>
@@ -41508,6 +41760,7 @@
                   <a:srgbClr val="1B3B6F"/>
                 </a:solidFill>
                 <a:latin typeface="Amiri" pitchFamily="2" charset="-78"/>
+                <a:ea typeface="Amiri" pitchFamily="2" charset="-78"/>
                 <a:cs typeface="Amiri" pitchFamily="2" charset="-78"/>
               </a:rPr>
               <a:t>تَكَلَّمْ أَكْثَرَ، مِنْ فَضْلِكَ</a:t>
@@ -41584,6 +41837,7 @@
                   <a:srgbClr val="1B3B6F"/>
                 </a:solidFill>
                 <a:latin typeface="Amiri" pitchFamily="2" charset="-78"/>
+                <a:ea typeface="Amiri" pitchFamily="2" charset="-78"/>
                 <a:cs typeface="Amiri" pitchFamily="2" charset="-78"/>
               </a:rPr>
               <a:t>لِمَاذَا؟</a:t>
@@ -41755,6 +42009,7 @@
                   <a:srgbClr val="D4AF37"/>
                 </a:solidFill>
                 <a:latin typeface="Amiri" pitchFamily="2" charset="-78"/>
+                <a:ea typeface="Amiri" pitchFamily="2" charset="-78"/>
                 <a:cs typeface="Amiri" pitchFamily="2" charset="-78"/>
               </a:rPr>
               <a:t>م</a:t>
@@ -42075,6 +42330,7 @@
                   <a:srgbClr val="8A6D1E"/>
                 </a:solidFill>
                 <a:latin typeface="Amiri" pitchFamily="2" charset="-78"/>
+                <a:ea typeface="Amiri" pitchFamily="2" charset="-78"/>
                 <a:cs typeface="Amiri" pitchFamily="2" charset="-78"/>
               </a:rPr>
               <a:t>فِي بَيْتِ الشَّبَابِ</a:t>
@@ -42355,6 +42611,7 @@
                   <a:srgbClr val="1B3B6F"/>
                 </a:solidFill>
                 <a:latin typeface="Amiri" pitchFamily="2" charset="-78"/>
+                <a:ea typeface="Amiri" pitchFamily="2" charset="-78"/>
                 <a:cs typeface="Amiri" pitchFamily="2" charset="-78"/>
               </a:rPr>
               <a:t>نَعَمْ، حَجَزْتُ … لَيَالٍ</a:t>
@@ -42431,6 +42688,7 @@
                   <a:srgbClr val="1B3B6F"/>
                 </a:solidFill>
                 <a:latin typeface="Amiri" pitchFamily="2" charset="-78"/>
+                <a:ea typeface="Amiri" pitchFamily="2" charset="-78"/>
                 <a:cs typeface="Amiri" pitchFamily="2" charset="-78"/>
               </a:rPr>
               <a:t>أَهْلًا! هَلْ عِنْدَكَ حَجْزٌ؟</a:t>
@@ -42599,6 +42857,7 @@
                   <a:srgbClr val="1B3B6F"/>
                 </a:solidFill>
                 <a:latin typeface="Amiri" pitchFamily="2" charset="-78"/>
+                <a:ea typeface="Amiri" pitchFamily="2" charset="-78"/>
                 <a:cs typeface="Amiri" pitchFamily="2" charset="-78"/>
               </a:rPr>
               <a:t>كَانَ الجَوُّ … وَ…</a:t>
@@ -42675,6 +42934,7 @@
                   <a:srgbClr val="1B3B6F"/>
                 </a:solidFill>
                 <a:latin typeface="Amiri" pitchFamily="2" charset="-78"/>
+                <a:ea typeface="Amiri" pitchFamily="2" charset="-78"/>
                 <a:cs typeface="Amiri" pitchFamily="2" charset="-78"/>
               </a:rPr>
               <a:t>كَيْفَ كَانَ الطَّقْسُ فِي الطَّرِيقِ؟</a:t>
@@ -42843,6 +43103,7 @@
                   <a:srgbClr val="1B3B6F"/>
                 </a:solidFill>
                 <a:latin typeface="Amiri" pitchFamily="2" charset="-78"/>
+                <a:ea typeface="Amiri" pitchFamily="2" charset="-78"/>
                 <a:cs typeface="Amiri" pitchFamily="2" charset="-78"/>
               </a:rPr>
               <a:t>أُرِيدُ أَنْ أَزُورَ … وَ…</a:t>
@@ -42919,6 +43180,7 @@
                   <a:srgbClr val="1B3B6F"/>
                 </a:solidFill>
                 <a:latin typeface="Amiri" pitchFamily="2" charset="-78"/>
+                <a:ea typeface="Amiri" pitchFamily="2" charset="-78"/>
                 <a:cs typeface="Amiri" pitchFamily="2" charset="-78"/>
               </a:rPr>
               <a:t>مَاذَا تُرِيدُ أَنْ تَزُورَ فِي المَدِينَةِ؟</a:t>
@@ -43087,6 +43349,7 @@
                   <a:srgbClr val="1B3B6F"/>
                 </a:solidFill>
                 <a:latin typeface="Amiri" pitchFamily="2" charset="-78"/>
+                <a:ea typeface="Amiri" pitchFamily="2" charset="-78"/>
                 <a:cs typeface="Amiri" pitchFamily="2" charset="-78"/>
               </a:rPr>
               <a:t>مَا … مِنْ فَضْلِكَ؟</a:t>
@@ -43163,6 +43426,7 @@
                   <a:srgbClr val="1B3B6F"/>
                 </a:solidFill>
                 <a:latin typeface="Amiri" pitchFamily="2" charset="-78"/>
+                <a:ea typeface="Amiri" pitchFamily="2" charset="-78"/>
                 <a:cs typeface="Amiri" pitchFamily="2" charset="-78"/>
               </a:rPr>
               <a:t>عِنْدَنَا إِنْتَرْنِتٌ مَجَّانِيٌّ.</a:t>
@@ -43331,6 +43595,7 @@
                   <a:srgbClr val="1B3B6F"/>
                 </a:solidFill>
                 <a:latin typeface="Amiri" pitchFamily="2" charset="-78"/>
+                <a:ea typeface="Amiri" pitchFamily="2" charset="-78"/>
                 <a:cs typeface="Amiri" pitchFamily="2" charset="-78"/>
               </a:rPr>
               <a:t>نَعَمْ، أُعِيدُ تَدْوِيرَ … فِي البَيْتِ</a:t>
@@ -43407,6 +43672,7 @@
                   <a:srgbClr val="1B3B6F"/>
                 </a:solidFill>
                 <a:latin typeface="Amiri" pitchFamily="2" charset="-78"/>
+                <a:ea typeface="Amiri" pitchFamily="2" charset="-78"/>
                 <a:cs typeface="Amiri" pitchFamily="2" charset="-78"/>
               </a:rPr>
               <a:t>هَلْ تُعِيدُ التَّدْوِيرَ؟ عِنْدَنَا ثَلَاثُ سَلَّاتٍ.</a:t>
@@ -43681,6 +43947,7 @@
                   <a:srgbClr val="D4AF37"/>
                 </a:solidFill>
                 <a:latin typeface="Amiri" pitchFamily="2" charset="-78"/>
+                <a:ea typeface="Amiri" pitchFamily="2" charset="-78"/>
                 <a:cs typeface="Amiri" pitchFamily="2" charset="-78"/>
               </a:rPr>
               <a:t>م</a:t>
@@ -44001,6 +44268,7 @@
                   <a:srgbClr val="8A6D1E"/>
                 </a:solidFill>
                 <a:latin typeface="Amiri" pitchFamily="2" charset="-78"/>
+                <a:ea typeface="Amiri" pitchFamily="2" charset="-78"/>
                 <a:cs typeface="Amiri" pitchFamily="2" charset="-78"/>
               </a:rPr>
               <a:t>رِحْلَةُ نِهَايَةِ السَّنَةِ</a:t>
@@ -44281,6 +44549,7 @@
                   <a:srgbClr val="1B3B6F"/>
                 </a:solidFill>
                 <a:latin typeface="Amiri" pitchFamily="2" charset="-78"/>
+                <a:ea typeface="Amiri" pitchFamily="2" charset="-78"/>
                 <a:cs typeface="Amiri" pitchFamily="2" charset="-78"/>
               </a:rPr>
               <a:t>نُرِيدُ أَنْ نَذْهَبَ إِلَى … لِأَنَّ …</a:t>
@@ -44357,6 +44626,7 @@
                   <a:srgbClr val="1B3B6F"/>
                 </a:solidFill>
                 <a:latin typeface="Amiri" pitchFamily="2" charset="-78"/>
+                <a:ea typeface="Amiri" pitchFamily="2" charset="-78"/>
                 <a:cs typeface="Amiri" pitchFamily="2" charset="-78"/>
               </a:rPr>
               <a:t>أَيْنَ تُرِيدُونَ أَنْ تَذْهَبُوا؟</a:t>
@@ -44525,6 +44795,7 @@
                   <a:srgbClr val="1B3B6F"/>
                 </a:solidFill>
                 <a:latin typeface="Amiri" pitchFamily="2" charset="-78"/>
+                <a:ea typeface="Amiri" pitchFamily="2" charset="-78"/>
                 <a:cs typeface="Amiri" pitchFamily="2" charset="-78"/>
               </a:rPr>
               <a:t>بِالقِطَارِ، لِأَنَّهُ …</a:t>
@@ -44601,6 +44872,7 @@
                   <a:srgbClr val="1B3B6F"/>
                 </a:solidFill>
                 <a:latin typeface="Amiri" pitchFamily="2" charset="-78"/>
+                <a:ea typeface="Amiri" pitchFamily="2" charset="-78"/>
                 <a:cs typeface="Amiri" pitchFamily="2" charset="-78"/>
               </a:rPr>
               <a:t>وَكَيْفَ نَذْهَبُ؟</a:t>
@@ -44769,6 +45041,7 @@
                   <a:srgbClr val="1B3B6F"/>
                 </a:solidFill>
                 <a:latin typeface="Amiri" pitchFamily="2" charset="-78"/>
+                <a:ea typeface="Amiri" pitchFamily="2" charset="-78"/>
                 <a:cs typeface="Amiri" pitchFamily="2" charset="-78"/>
               </a:rPr>
               <a:t>وَإِذَا أَمْطَرَتْ، هَلْ …؟</a:t>
@@ -44845,6 +45118,7 @@
                   <a:srgbClr val="1B3B6F"/>
                 </a:solidFill>
                 <a:latin typeface="Amiri" pitchFamily="2" charset="-78"/>
+                <a:ea typeface="Amiri" pitchFamily="2" charset="-78"/>
                 <a:cs typeface="Amiri" pitchFamily="2" charset="-78"/>
               </a:rPr>
               <a:t>لٰكِنْ قَدْ يَكُونُ الجَوُّ مُمْطِرًا.</a:t>
@@ -44948,6 +45222,7 @@
                   <a:srgbClr val="1B3B6F"/>
                 </a:solidFill>
                 <a:latin typeface="Amiri" pitchFamily="2" charset="-78"/>
+                <a:ea typeface="Amiri" pitchFamily="2" charset="-78"/>
                 <a:cs typeface="Amiri" pitchFamily="2" charset="-78"/>
               </a:rPr>
               <a:t>مِنْ نَاحِيَةٍ … وَمِنْ نَاحِيَةٍ أُخْرَى …</a:t>
@@ -45024,6 +45299,7 @@
                   <a:srgbClr val="1B3B6F"/>
                 </a:solidFill>
                 <a:latin typeface="Amiri" pitchFamily="2" charset="-78"/>
+                <a:ea typeface="Amiri" pitchFamily="2" charset="-78"/>
                 <a:cs typeface="Amiri" pitchFamily="2" charset="-78"/>
               </a:rPr>
               <a:t>فِكْرَةٌ جَيِّدَةٌ. وَالهَوَاتِفُ؟</a:t>
@@ -45127,6 +45403,7 @@
                   <a:srgbClr val="1B3B6F"/>
                 </a:solidFill>
                 <a:latin typeface="Amiri" pitchFamily="2" charset="-78"/>
+                <a:ea typeface="Amiri" pitchFamily="2" charset="-78"/>
                 <a:cs typeface="Amiri" pitchFamily="2" charset="-78"/>
               </a:rPr>
               <a:t>ذَهَبْنَا إِلَى … وَ…</a:t>
@@ -45203,6 +45480,7 @@
                   <a:srgbClr val="1B3B6F"/>
                 </a:solidFill>
                 <a:latin typeface="Amiri" pitchFamily="2" charset="-78"/>
+                <a:ea typeface="Amiri" pitchFamily="2" charset="-78"/>
                 <a:cs typeface="Amiri" pitchFamily="2" charset="-78"/>
               </a:rPr>
               <a:t>مَاذَا فَعَلْتُمْ فِي رِحْلَةِ السَّنَةِ المَاضِيَةِ؟</a:t>
@@ -45377,13 +45655,9 @@
     <a:fontScheme name="Office">
       <a:majorFont>
         <a:latin typeface="Calibri Light" panose="020F0302020204030204"/>
-        <a:ea typeface=""/>
-        <a:cs typeface=""/>
-        <a:font script="Jpan" typeface="游ゴシック Light"/>
-        <a:font script="Hang" typeface="맑은 고딕"/>
-        <a:font script="Hans" typeface="等线 Light"/>
-        <a:font script="Hant" typeface="新細明體"/>
-        <a:font script="Arab" typeface="Times New Roman"/>
+        <a:ea typeface="Amiri" pitchFamily="2" charset="-78"/>
+        <a:cs typeface="Amiri" pitchFamily="2" charset="-78"/>
+        <a:font script="Arab" typeface="Amiri"/>
         <a:font script="Hebr" typeface="Times New Roman"/>
         <a:font script="Thai" typeface="Angsana New"/>
         <a:font script="Ethi" typeface="Nyala"/>
@@ -45429,13 +45703,9 @@
       </a:majorFont>
       <a:minorFont>
         <a:latin typeface="Calibri" panose="020F0502020204030204"/>
-        <a:ea typeface=""/>
-        <a:cs typeface=""/>
-        <a:font script="Jpan" typeface="游ゴシック"/>
-        <a:font script="Hang" typeface="맑은 고딕"/>
-        <a:font script="Hans" typeface="等线"/>
-        <a:font script="Hant" typeface="新細明體"/>
-        <a:font script="Arab" typeface="Arial"/>
+        <a:ea typeface="Amiri" pitchFamily="2" charset="-78"/>
+        <a:cs typeface="Amiri" pitchFamily="2" charset="-78"/>
+        <a:font script="Arab" typeface="Amiri"/>
         <a:font script="Hebr" typeface="Arial"/>
         <a:font script="Thai" typeface="Cordia New"/>
         <a:font script="Ethi" typeface="Nyala"/>
